--- a/Präsentation_Refactoring/Softwarearchäologie live.pptx
+++ b/Präsentation_Refactoring/Softwarearchäologie live.pptx
@@ -5,7 +5,7 @@
     <p:sldMasterId id="2147483829" r:id="rId6"/>
   </p:sldMasterIdLst>
   <p:notesMasterIdLst>
-    <p:notesMasterId r:id="rId21"/>
+    <p:notesMasterId r:id="rId27"/>
   </p:notesMasterIdLst>
   <p:sldIdLst>
     <p:sldId id="256" r:id="rId7"/>
@@ -22,6 +22,12 @@
     <p:sldId id="267" r:id="rId18"/>
     <p:sldId id="268" r:id="rId19"/>
     <p:sldId id="269" r:id="rId20"/>
+    <p:sldId id="270" r:id="rId21"/>
+    <p:sldId id="273" r:id="rId22"/>
+    <p:sldId id="271" r:id="rId23"/>
+    <p:sldId id="274" r:id="rId24"/>
+    <p:sldId id="275" r:id="rId25"/>
+    <p:sldId id="276" r:id="rId26"/>
   </p:sldIdLst>
   <p:sldSz cx="12192000" cy="6858000"/>
   <p:notesSz cx="6858000" cy="9144000"/>
@@ -169,6 +175,12 @@
             <p14:sldId id="267"/>
             <p14:sldId id="268"/>
             <p14:sldId id="269"/>
+            <p14:sldId id="270"/>
+            <p14:sldId id="273"/>
+            <p14:sldId id="271"/>
+            <p14:sldId id="274"/>
+            <p14:sldId id="275"/>
+            <p14:sldId id="276"/>
           </p14:sldIdLst>
         </p14:section>
       </p14:sectionLst>
@@ -31197,7 +31209,7 @@
             </a:pPr>
             <a:r>
               <a:rPr lang="de-DE" dirty="0"/>
-              <a:t>Überprüfen, ob der aktuelle Stand funktioniert (Hat er ja bereits)</a:t>
+              <a:t>Überprüfen, ob der aktuelle Stand funktioniert (Hat er ja bereits, IIRC)</a:t>
             </a:r>
           </a:p>
           <a:p>
@@ -31227,7 +31239,10 @@
             </a:r>
           </a:p>
           <a:p>
-            <a:endParaRPr lang="de-DE" dirty="0"/>
+            <a:r>
+              <a:rPr lang="de-DE" dirty="0"/>
+              <a:t>Copilot hatte das SUT nicht klar definiert. Systemgrenzen teilweise unscharf. Hängt sich sehr an Fachbegriffen (DUT, SUT) auf</a:t>
+            </a:r>
           </a:p>
         </p:txBody>
       </p:sp>
@@ -31456,12 +31471,129 @@
             <a:pPr lvl="1"/>
             <a:r>
               <a:rPr lang="de-DE" dirty="0"/>
-              <a:t>Mal schauen, ob alles per </a:t>
-            </a:r>
-            <a:r>
-              <a:rPr lang="de-DE"/>
-              <a:t>SSH geht.</a:t>
-            </a:r>
+              <a:t>Mal schauen, ob alles per SSH geht.</a:t>
+            </a:r>
+          </a:p>
+          <a:p>
+            <a:pPr lvl="1"/>
+            <a:r>
+              <a:rPr lang="de-DE" dirty="0"/>
+              <a:t>2h Arbeit um </a:t>
+            </a:r>
+            <a:r>
+              <a:rPr lang="de-DE" dirty="0" err="1"/>
+              <a:t>bootzeit</a:t>
+            </a:r>
+            <a:r>
+              <a:rPr lang="de-DE" dirty="0"/>
+              <a:t> von 2 ½ </a:t>
+            </a:r>
+            <a:r>
+              <a:rPr lang="de-DE" dirty="0" err="1"/>
+              <a:t>minuten</a:t>
+            </a:r>
+            <a:r>
+              <a:rPr lang="de-DE" dirty="0"/>
+              <a:t> auf 1 ½ </a:t>
+            </a:r>
+            <a:r>
+              <a:rPr lang="de-DE" dirty="0" err="1"/>
+              <a:t>minuten</a:t>
+            </a:r>
+            <a:r>
+              <a:rPr lang="de-DE" dirty="0"/>
+              <a:t> zu reduzieren. ChatGPT dreht sich am Ende im Kreis.</a:t>
+            </a:r>
+          </a:p>
+          <a:p>
+            <a:r>
+              <a:rPr lang="de-DE" dirty="0"/>
+              <a:t>Hinweis Copilot: 8GB SD Karte ist nicht wirklich geeignet für Docker, </a:t>
+            </a:r>
+            <a:r>
+              <a:rPr lang="de-DE" dirty="0" err="1"/>
+              <a:t>compiler</a:t>
+            </a:r>
+            <a:r>
+              <a:rPr lang="de-DE" dirty="0"/>
+              <a:t>, </a:t>
+            </a:r>
+            <a:r>
+              <a:rPr lang="de-DE" dirty="0" err="1"/>
+              <a:t>toolchains</a:t>
+            </a:r>
+            <a:r>
+              <a:rPr lang="de-DE" dirty="0"/>
+              <a:t>, </a:t>
+            </a:r>
+            <a:r>
+              <a:rPr lang="de-DE" dirty="0" err="1"/>
+              <a:t>build</a:t>
+            </a:r>
+            <a:r>
+              <a:rPr lang="de-DE" dirty="0"/>
+              <a:t> </a:t>
+            </a:r>
+            <a:r>
+              <a:rPr lang="de-DE" dirty="0" err="1"/>
+              <a:t>dirs</a:t>
+            </a:r>
+            <a:r>
+              <a:rPr lang="de-DE" dirty="0"/>
+              <a:t>, </a:t>
+            </a:r>
+            <a:r>
+              <a:rPr lang="de-DE" dirty="0" err="1"/>
+              <a:t>test</a:t>
+            </a:r>
+            <a:r>
+              <a:rPr lang="de-DE" dirty="0"/>
+              <a:t> </a:t>
+            </a:r>
+            <a:r>
+              <a:rPr lang="de-DE" dirty="0" err="1"/>
+              <a:t>artifacts</a:t>
+            </a:r>
+            <a:r>
+              <a:rPr lang="de-DE" dirty="0"/>
+              <a:t>, etc.</a:t>
+            </a:r>
+          </a:p>
+          <a:p>
+            <a:r>
+              <a:rPr lang="de-DE" dirty="0"/>
+              <a:t>Guter Hinweis ChatGPT: GDB zum </a:t>
+            </a:r>
+            <a:r>
+              <a:rPr lang="de-DE" dirty="0" err="1"/>
+              <a:t>Flashen</a:t>
+            </a:r>
+            <a:r>
+              <a:rPr lang="de-DE" dirty="0"/>
+              <a:t> wird im </a:t>
+            </a:r>
+            <a:r>
+              <a:rPr lang="de-DE" dirty="0" err="1"/>
+              <a:t>Build</a:t>
+            </a:r>
+            <a:r>
+              <a:rPr lang="de-DE" dirty="0"/>
+              <a:t> und im Testcontainer benötigt.</a:t>
+            </a:r>
+          </a:p>
+          <a:p>
+            <a:r>
+              <a:rPr lang="de-DE" dirty="0"/>
+              <a:t>Guter Hinweis #2: gemeinsamer Workspace für beide Container</a:t>
+            </a:r>
+          </a:p>
+          <a:p>
+            <a:r>
+              <a:rPr lang="de-DE" dirty="0"/>
+              <a:t>Infrastruktur aufsetzen, Copilot als Gesprächspartner. Docker hätte sonst länger gedauert</a:t>
+            </a:r>
+          </a:p>
+          <a:p>
             <a:endParaRPr lang="de-DE" dirty="0"/>
           </a:p>
         </p:txBody>
@@ -31577,6 +31709,1446 @@
     <p:extLst>
       <p:ext uri="{BB962C8B-B14F-4D97-AF65-F5344CB8AC3E}">
         <p14:creationId xmlns:p14="http://schemas.microsoft.com/office/powerpoint/2010/main" val="2480507003"/>
+      </p:ext>
+    </p:extLst>
+  </p:cSld>
+  <p:clrMapOvr>
+    <a:masterClrMapping/>
+  </p:clrMapOvr>
+</p:sld>
+</file>
+
+<file path=ppt/slides/slide15.xml><?xml version="1.0" encoding="utf-8"?>
+<p:sld xmlns:a="http://schemas.openxmlformats.org/drawingml/2006/main" xmlns:r="http://schemas.openxmlformats.org/officeDocument/2006/relationships" xmlns:p="http://schemas.openxmlformats.org/presentationml/2006/main">
+  <p:cSld>
+    <p:spTree>
+      <p:nvGrpSpPr>
+        <p:cNvPr id="1" name=""/>
+        <p:cNvGrpSpPr/>
+        <p:nvPr/>
+      </p:nvGrpSpPr>
+      <p:grpSpPr>
+        <a:xfrm>
+          <a:off x="0" y="0"/>
+          <a:ext cx="0" cy="0"/>
+          <a:chOff x="0" y="0"/>
+          <a:chExt cx="0" cy="0"/>
+        </a:xfrm>
+      </p:grpSpPr>
+      <p:sp>
+        <p:nvSpPr>
+          <p:cNvPr id="2" name="Fußzeilenplatzhalter 1">
+            <a:extLst>
+              <a:ext uri="{FF2B5EF4-FFF2-40B4-BE49-F238E27FC236}">
+                <a16:creationId xmlns:a16="http://schemas.microsoft.com/office/drawing/2014/main" id="{FE93C4BA-CB14-6D36-AB9B-CF0E543ED137}"/>
+              </a:ext>
+            </a:extLst>
+          </p:cNvPr>
+          <p:cNvSpPr>
+            <a:spLocks noGrp="1"/>
+          </p:cNvSpPr>
+          <p:nvPr>
+            <p:ph type="ftr" sz="quarter" idx="3"/>
+          </p:nvPr>
+        </p:nvSpPr>
+        <p:spPr/>
+        <p:txBody>
+          <a:bodyPr/>
+          <a:lstStyle/>
+          <a:p>
+            <a:r>
+              <a:rPr lang="de-DE"/>
+              <a:t>Unternehmensmaster Smart Mechatronics</a:t>
+            </a:r>
+            <a:endParaRPr lang="de-DE" dirty="0"/>
+          </a:p>
+        </p:txBody>
+      </p:sp>
+      <p:sp>
+        <p:nvSpPr>
+          <p:cNvPr id="3" name="Inhaltsplatzhalter 2">
+            <a:extLst>
+              <a:ext uri="{FF2B5EF4-FFF2-40B4-BE49-F238E27FC236}">
+                <a16:creationId xmlns:a16="http://schemas.microsoft.com/office/drawing/2014/main" id="{F94596A2-4A77-5494-83AA-AAFE289FB0BD}"/>
+              </a:ext>
+            </a:extLst>
+          </p:cNvPr>
+          <p:cNvSpPr>
+            <a:spLocks noGrp="1"/>
+          </p:cNvSpPr>
+          <p:nvPr>
+            <p:ph idx="1"/>
+          </p:nvPr>
+        </p:nvSpPr>
+        <p:spPr/>
+        <p:txBody>
+          <a:bodyPr/>
+          <a:lstStyle/>
+          <a:p>
+            <a:r>
+              <a:rPr lang="de-DE" dirty="0" err="1"/>
+              <a:t>Grundfunction</a:t>
+            </a:r>
+            <a:r>
+              <a:rPr lang="de-DE" dirty="0"/>
+              <a:t> Testframework:	</a:t>
+            </a:r>
+          </a:p>
+          <a:p>
+            <a:pPr lvl="1"/>
+            <a:r>
+              <a:rPr lang="de-DE" dirty="0"/>
+              <a:t>Pass</a:t>
+            </a:r>
+          </a:p>
+          <a:p>
+            <a:r>
+              <a:rPr lang="de-DE" dirty="0"/>
+              <a:t>Erreichbarkeit </a:t>
+            </a:r>
+            <a:r>
+              <a:rPr lang="de-DE" dirty="0" err="1"/>
+              <a:t>pcberry</a:t>
+            </a:r>
+            <a:r>
+              <a:rPr lang="de-DE" dirty="0"/>
+              <a:t> von </a:t>
+            </a:r>
+            <a:r>
+              <a:rPr lang="de-DE" dirty="0" err="1"/>
+              <a:t>Testberry</a:t>
+            </a:r>
+            <a:r>
+              <a:rPr lang="de-DE" dirty="0"/>
+              <a:t> (aus dem Container heraus)</a:t>
+            </a:r>
+          </a:p>
+          <a:p>
+            <a:pPr lvl="1"/>
+            <a:r>
+              <a:rPr lang="de-DE" dirty="0"/>
+              <a:t>Schwierig, da Container </a:t>
+            </a:r>
+            <a:r>
+              <a:rPr lang="de-DE" dirty="0" err="1"/>
+              <a:t>nichtmal</a:t>
+            </a:r>
+            <a:r>
+              <a:rPr lang="de-DE" dirty="0"/>
+              <a:t> Funktionen wie „ping“ kennt.</a:t>
+            </a:r>
+          </a:p>
+          <a:p>
+            <a:pPr lvl="1"/>
+            <a:r>
+              <a:rPr lang="de-DE" dirty="0"/>
+              <a:t>AI hilft bei der Installation.</a:t>
+            </a:r>
+          </a:p>
+          <a:p>
+            <a:pPr lvl="1"/>
+            <a:r>
+              <a:rPr lang="de-DE" dirty="0" err="1"/>
+              <a:t>VSCode</a:t>
+            </a:r>
+            <a:r>
+              <a:rPr lang="de-DE" dirty="0"/>
+              <a:t> remote </a:t>
+            </a:r>
+            <a:r>
+              <a:rPr lang="de-DE" dirty="0" err="1"/>
+              <a:t>debugging</a:t>
+            </a:r>
+            <a:r>
+              <a:rPr lang="de-DE" dirty="0"/>
+              <a:t> via SSH läuft auf dem </a:t>
+            </a:r>
+            <a:r>
+              <a:rPr lang="de-DE" dirty="0" err="1"/>
+              <a:t>testberry</a:t>
+            </a:r>
+            <a:r>
+              <a:rPr lang="de-DE" dirty="0"/>
+              <a:t> nicht, da veraltetes 32bit </a:t>
+            </a:r>
+            <a:r>
+              <a:rPr lang="de-DE" dirty="0" err="1"/>
+              <a:t>system</a:t>
+            </a:r>
+            <a:endParaRPr lang="de-DE" dirty="0"/>
+          </a:p>
+          <a:p>
+            <a:pPr marL="0" indent="0">
+              <a:buNone/>
+            </a:pPr>
+            <a:endParaRPr lang="de-DE" dirty="0"/>
+          </a:p>
+        </p:txBody>
+      </p:sp>
+      <p:sp>
+        <p:nvSpPr>
+          <p:cNvPr id="4" name="Datumsplatzhalter 3">
+            <a:extLst>
+              <a:ext uri="{FF2B5EF4-FFF2-40B4-BE49-F238E27FC236}">
+                <a16:creationId xmlns:a16="http://schemas.microsoft.com/office/drawing/2014/main" id="{BD21C0EE-BAF8-963D-8E54-4160B90E1D23}"/>
+              </a:ext>
+            </a:extLst>
+          </p:cNvPr>
+          <p:cNvSpPr>
+            <a:spLocks noGrp="1"/>
+          </p:cNvSpPr>
+          <p:nvPr>
+            <p:ph type="dt" sz="half" idx="2"/>
+          </p:nvPr>
+        </p:nvSpPr>
+        <p:spPr/>
+        <p:txBody>
+          <a:bodyPr/>
+          <a:lstStyle/>
+          <a:p>
+            <a:fld id="{A4055450-52AE-4C8B-9714-2843C81CF833}" type="datetime1">
+              <a:rPr lang="de-DE" smtClean="0"/>
+              <a:t>02.09.2026</a:t>
+            </a:fld>
+            <a:endParaRPr lang="de-DE" dirty="0"/>
+          </a:p>
+        </p:txBody>
+      </p:sp>
+      <p:sp>
+        <p:nvSpPr>
+          <p:cNvPr id="5" name="Titel 4">
+            <a:extLst>
+              <a:ext uri="{FF2B5EF4-FFF2-40B4-BE49-F238E27FC236}">
+                <a16:creationId xmlns:a16="http://schemas.microsoft.com/office/drawing/2014/main" id="{83EE6B2B-D56E-A021-E58F-AAF335F4BB26}"/>
+              </a:ext>
+            </a:extLst>
+          </p:cNvPr>
+          <p:cNvSpPr>
+            <a:spLocks noGrp="1"/>
+          </p:cNvSpPr>
+          <p:nvPr>
+            <p:ph type="title"/>
+          </p:nvPr>
+        </p:nvSpPr>
+        <p:spPr/>
+        <p:txBody>
+          <a:bodyPr/>
+          <a:lstStyle/>
+          <a:p>
+            <a:r>
+              <a:rPr lang="de-DE" dirty="0"/>
+              <a:t>Erste Tests</a:t>
+            </a:r>
+          </a:p>
+        </p:txBody>
+      </p:sp>
+      <p:sp>
+        <p:nvSpPr>
+          <p:cNvPr id="6" name="Foliennummernplatzhalter 5">
+            <a:extLst>
+              <a:ext uri="{FF2B5EF4-FFF2-40B4-BE49-F238E27FC236}">
+                <a16:creationId xmlns:a16="http://schemas.microsoft.com/office/drawing/2014/main" id="{79BA2BD3-451F-F46F-5950-359A0A395EA3}"/>
+              </a:ext>
+            </a:extLst>
+          </p:cNvPr>
+          <p:cNvSpPr>
+            <a:spLocks noGrp="1"/>
+          </p:cNvSpPr>
+          <p:nvPr>
+            <p:ph type="sldNum" sz="quarter" idx="4"/>
+          </p:nvPr>
+        </p:nvSpPr>
+        <p:spPr/>
+        <p:txBody>
+          <a:bodyPr/>
+          <a:lstStyle/>
+          <a:p>
+            <a:fld id="{369A084B-84B6-4F15-B0F5-CCDC4176846B}" type="slidenum">
+              <a:rPr lang="de-DE" smtClean="0"/>
+              <a:pPr/>
+              <a:t>15</a:t>
+            </a:fld>
+            <a:endParaRPr lang="de-DE" dirty="0"/>
+          </a:p>
+        </p:txBody>
+      </p:sp>
+    </p:spTree>
+    <p:extLst>
+      <p:ext uri="{BB962C8B-B14F-4D97-AF65-F5344CB8AC3E}">
+        <p14:creationId xmlns:p14="http://schemas.microsoft.com/office/powerpoint/2010/main" val="890860600"/>
+      </p:ext>
+    </p:extLst>
+  </p:cSld>
+  <p:clrMapOvr>
+    <a:masterClrMapping/>
+  </p:clrMapOvr>
+</p:sld>
+</file>
+
+<file path=ppt/slides/slide16.xml><?xml version="1.0" encoding="utf-8"?>
+<p:sld xmlns:a="http://schemas.openxmlformats.org/drawingml/2006/main" xmlns:r="http://schemas.openxmlformats.org/officeDocument/2006/relationships" xmlns:p="http://schemas.openxmlformats.org/presentationml/2006/main">
+  <p:cSld>
+    <p:spTree>
+      <p:nvGrpSpPr>
+        <p:cNvPr id="1" name="">
+          <a:extLst>
+            <a:ext uri="{FF2B5EF4-FFF2-40B4-BE49-F238E27FC236}">
+              <a16:creationId xmlns:a16="http://schemas.microsoft.com/office/drawing/2014/main" id="{8181F4BA-B716-620A-716E-5E2757317C1F}"/>
+            </a:ext>
+          </a:extLst>
+        </p:cNvPr>
+        <p:cNvGrpSpPr/>
+        <p:nvPr/>
+      </p:nvGrpSpPr>
+      <p:grpSpPr>
+        <a:xfrm>
+          <a:off x="0" y="0"/>
+          <a:ext cx="0" cy="0"/>
+          <a:chOff x="0" y="0"/>
+          <a:chExt cx="0" cy="0"/>
+        </a:xfrm>
+      </p:grpSpPr>
+      <p:sp>
+        <p:nvSpPr>
+          <p:cNvPr id="2" name="Fußzeilenplatzhalter 1">
+            <a:extLst>
+              <a:ext uri="{FF2B5EF4-FFF2-40B4-BE49-F238E27FC236}">
+                <a16:creationId xmlns:a16="http://schemas.microsoft.com/office/drawing/2014/main" id="{05B0D190-8513-7CC5-7248-DF02D3320283}"/>
+              </a:ext>
+            </a:extLst>
+          </p:cNvPr>
+          <p:cNvSpPr>
+            <a:spLocks noGrp="1"/>
+          </p:cNvSpPr>
+          <p:nvPr>
+            <p:ph type="ftr" sz="quarter" idx="3"/>
+          </p:nvPr>
+        </p:nvSpPr>
+        <p:spPr/>
+        <p:txBody>
+          <a:bodyPr/>
+          <a:lstStyle/>
+          <a:p>
+            <a:r>
+              <a:rPr lang="de-DE"/>
+              <a:t>Unternehmensmaster Smart Mechatronics</a:t>
+            </a:r>
+            <a:endParaRPr lang="de-DE" dirty="0"/>
+          </a:p>
+        </p:txBody>
+      </p:sp>
+      <p:sp>
+        <p:nvSpPr>
+          <p:cNvPr id="3" name="Inhaltsplatzhalter 2">
+            <a:extLst>
+              <a:ext uri="{FF2B5EF4-FFF2-40B4-BE49-F238E27FC236}">
+                <a16:creationId xmlns:a16="http://schemas.microsoft.com/office/drawing/2014/main" id="{E58EA78E-517D-2A8D-C11E-ADE15BC6F186}"/>
+              </a:ext>
+            </a:extLst>
+          </p:cNvPr>
+          <p:cNvSpPr>
+            <a:spLocks noGrp="1"/>
+          </p:cNvSpPr>
+          <p:nvPr>
+            <p:ph idx="1"/>
+          </p:nvPr>
+        </p:nvSpPr>
+        <p:spPr/>
+        <p:txBody>
+          <a:bodyPr/>
+          <a:lstStyle/>
+          <a:p>
+            <a:r>
+              <a:rPr lang="de-DE" dirty="0"/>
+              <a:t>Um das Testframework  zu vervollständigen, sind Änderungen an der SUT-Architektur nötig.</a:t>
+            </a:r>
+          </a:p>
+          <a:p>
+            <a:pPr lvl="1"/>
+            <a:r>
+              <a:rPr lang="de-DE" dirty="0"/>
+              <a:t>AI unterstützt durch Dokumentation der Vorgaben</a:t>
+            </a:r>
+          </a:p>
+          <a:p>
+            <a:pPr lvl="1"/>
+            <a:r>
+              <a:rPr lang="de-DE" dirty="0"/>
+              <a:t>Schwierigkeit: Spezifizität. „Change </a:t>
+            </a:r>
+            <a:r>
+              <a:rPr lang="de-DE" dirty="0" err="1"/>
+              <a:t>name</a:t>
+            </a:r>
+            <a:r>
+              <a:rPr lang="de-DE" dirty="0"/>
+              <a:t> of </a:t>
+            </a:r>
+            <a:r>
+              <a:rPr lang="de-DE" dirty="0" err="1"/>
+              <a:t>folder</a:t>
+            </a:r>
+            <a:r>
+              <a:rPr lang="de-DE" dirty="0"/>
+              <a:t>“: Auf welcher Maschine, in welchem Kontext?</a:t>
+            </a:r>
+          </a:p>
+          <a:p>
+            <a:r>
+              <a:rPr lang="de-DE" dirty="0"/>
+              <a:t>AI </a:t>
+            </a:r>
+            <a:r>
+              <a:rPr lang="de-DE" dirty="0" err="1"/>
+              <a:t>Assisted</a:t>
+            </a:r>
+            <a:r>
+              <a:rPr lang="de-DE" dirty="0"/>
+              <a:t> TDD:</a:t>
+            </a:r>
+          </a:p>
+          <a:p>
+            <a:pPr lvl="1"/>
+            <a:r>
+              <a:rPr lang="de-DE" dirty="0"/>
+              <a:t>Es gibt ja schon Funktionen, also erstmal Tests bauen, die die Funktion des SUT prüfen. Wenn das läuft, startet das eigentliche </a:t>
+            </a:r>
+            <a:r>
+              <a:rPr lang="de-DE" dirty="0" err="1"/>
+              <a:t>Refactoring</a:t>
+            </a:r>
+            <a:r>
+              <a:rPr lang="de-DE" dirty="0"/>
+              <a:t>.</a:t>
+            </a:r>
+          </a:p>
+          <a:p>
+            <a:pPr marL="358775" lvl="1" indent="0">
+              <a:buNone/>
+            </a:pPr>
+            <a:endParaRPr lang="de-DE" dirty="0"/>
+          </a:p>
+        </p:txBody>
+      </p:sp>
+      <p:sp>
+        <p:nvSpPr>
+          <p:cNvPr id="4" name="Datumsplatzhalter 3">
+            <a:extLst>
+              <a:ext uri="{FF2B5EF4-FFF2-40B4-BE49-F238E27FC236}">
+                <a16:creationId xmlns:a16="http://schemas.microsoft.com/office/drawing/2014/main" id="{02CA2DC0-55CD-B308-9ABB-487B5D41E432}"/>
+              </a:ext>
+            </a:extLst>
+          </p:cNvPr>
+          <p:cNvSpPr>
+            <a:spLocks noGrp="1"/>
+          </p:cNvSpPr>
+          <p:nvPr>
+            <p:ph type="dt" sz="half" idx="2"/>
+          </p:nvPr>
+        </p:nvSpPr>
+        <p:spPr/>
+        <p:txBody>
+          <a:bodyPr/>
+          <a:lstStyle/>
+          <a:p>
+            <a:fld id="{A4055450-52AE-4C8B-9714-2843C81CF833}" type="datetime1">
+              <a:rPr lang="de-DE" smtClean="0"/>
+              <a:t>03.09.2026</a:t>
+            </a:fld>
+            <a:endParaRPr lang="de-DE" dirty="0"/>
+          </a:p>
+        </p:txBody>
+      </p:sp>
+      <p:sp>
+        <p:nvSpPr>
+          <p:cNvPr id="5" name="Titel 4">
+            <a:extLst>
+              <a:ext uri="{FF2B5EF4-FFF2-40B4-BE49-F238E27FC236}">
+                <a16:creationId xmlns:a16="http://schemas.microsoft.com/office/drawing/2014/main" id="{5146904B-798B-B72F-3016-0872E5E79E54}"/>
+              </a:ext>
+            </a:extLst>
+          </p:cNvPr>
+          <p:cNvSpPr>
+            <a:spLocks noGrp="1"/>
+          </p:cNvSpPr>
+          <p:nvPr>
+            <p:ph type="title"/>
+          </p:nvPr>
+        </p:nvSpPr>
+        <p:spPr/>
+        <p:txBody>
+          <a:bodyPr/>
+          <a:lstStyle/>
+          <a:p>
+            <a:r>
+              <a:rPr lang="de-DE" dirty="0"/>
+              <a:t>Version 2</a:t>
+            </a:r>
+          </a:p>
+        </p:txBody>
+      </p:sp>
+      <p:sp>
+        <p:nvSpPr>
+          <p:cNvPr id="6" name="Foliennummernplatzhalter 5">
+            <a:extLst>
+              <a:ext uri="{FF2B5EF4-FFF2-40B4-BE49-F238E27FC236}">
+                <a16:creationId xmlns:a16="http://schemas.microsoft.com/office/drawing/2014/main" id="{8B07313D-23C3-4D62-0846-F5747D1F636C}"/>
+              </a:ext>
+            </a:extLst>
+          </p:cNvPr>
+          <p:cNvSpPr>
+            <a:spLocks noGrp="1"/>
+          </p:cNvSpPr>
+          <p:nvPr>
+            <p:ph type="sldNum" sz="quarter" idx="4"/>
+          </p:nvPr>
+        </p:nvSpPr>
+        <p:spPr/>
+        <p:txBody>
+          <a:bodyPr/>
+          <a:lstStyle/>
+          <a:p>
+            <a:fld id="{369A084B-84B6-4F15-B0F5-CCDC4176846B}" type="slidenum">
+              <a:rPr lang="de-DE" smtClean="0"/>
+              <a:pPr/>
+              <a:t>16</a:t>
+            </a:fld>
+            <a:endParaRPr lang="de-DE" dirty="0"/>
+          </a:p>
+        </p:txBody>
+      </p:sp>
+    </p:spTree>
+    <p:extLst>
+      <p:ext uri="{BB962C8B-B14F-4D97-AF65-F5344CB8AC3E}">
+        <p14:creationId xmlns:p14="http://schemas.microsoft.com/office/powerpoint/2010/main" val="3630468069"/>
+      </p:ext>
+    </p:extLst>
+  </p:cSld>
+  <p:clrMapOvr>
+    <a:masterClrMapping/>
+  </p:clrMapOvr>
+</p:sld>
+</file>
+
+<file path=ppt/slides/slide17.xml><?xml version="1.0" encoding="utf-8"?>
+<p:sld xmlns:a="http://schemas.openxmlformats.org/drawingml/2006/main" xmlns:r="http://schemas.openxmlformats.org/officeDocument/2006/relationships" xmlns:p="http://schemas.openxmlformats.org/presentationml/2006/main">
+  <p:cSld>
+    <p:spTree>
+      <p:nvGrpSpPr>
+        <p:cNvPr id="1" name=""/>
+        <p:cNvGrpSpPr/>
+        <p:nvPr/>
+      </p:nvGrpSpPr>
+      <p:grpSpPr>
+        <a:xfrm>
+          <a:off x="0" y="0"/>
+          <a:ext cx="0" cy="0"/>
+          <a:chOff x="0" y="0"/>
+          <a:chExt cx="0" cy="0"/>
+        </a:xfrm>
+      </p:grpSpPr>
+      <p:sp>
+        <p:nvSpPr>
+          <p:cNvPr id="2" name="Fußzeilenplatzhalter 1">
+            <a:extLst>
+              <a:ext uri="{FF2B5EF4-FFF2-40B4-BE49-F238E27FC236}">
+                <a16:creationId xmlns:a16="http://schemas.microsoft.com/office/drawing/2014/main" id="{5AB3574C-6EFA-1207-CA94-45A0D213B919}"/>
+              </a:ext>
+            </a:extLst>
+          </p:cNvPr>
+          <p:cNvSpPr>
+            <a:spLocks noGrp="1"/>
+          </p:cNvSpPr>
+          <p:nvPr>
+            <p:ph type="ftr" sz="quarter" idx="3"/>
+          </p:nvPr>
+        </p:nvSpPr>
+        <p:spPr/>
+        <p:txBody>
+          <a:bodyPr/>
+          <a:lstStyle/>
+          <a:p>
+            <a:r>
+              <a:rPr lang="de-DE"/>
+              <a:t>Unternehmensmaster Smart Mechatronics</a:t>
+            </a:r>
+            <a:endParaRPr lang="de-DE" dirty="0"/>
+          </a:p>
+        </p:txBody>
+      </p:sp>
+      <p:sp>
+        <p:nvSpPr>
+          <p:cNvPr id="3" name="Inhaltsplatzhalter 2">
+            <a:extLst>
+              <a:ext uri="{FF2B5EF4-FFF2-40B4-BE49-F238E27FC236}">
+                <a16:creationId xmlns:a16="http://schemas.microsoft.com/office/drawing/2014/main" id="{9E61E72C-AA8D-6584-6C6C-E924DFFCAC75}"/>
+              </a:ext>
+            </a:extLst>
+          </p:cNvPr>
+          <p:cNvSpPr>
+            <a:spLocks noGrp="1"/>
+          </p:cNvSpPr>
+          <p:nvPr>
+            <p:ph idx="1"/>
+          </p:nvPr>
+        </p:nvSpPr>
+        <p:spPr/>
+        <p:txBody>
+          <a:bodyPr/>
+          <a:lstStyle/>
+          <a:p>
+            <a:r>
+              <a:rPr lang="de-DE" dirty="0"/>
+              <a:t>AI baut </a:t>
+            </a:r>
+            <a:r>
+              <a:rPr lang="de-DE" dirty="0" err="1"/>
+              <a:t>unittests</a:t>
+            </a:r>
+            <a:r>
+              <a:rPr lang="de-DE" dirty="0"/>
+              <a:t> für REST-API. Backend wird durch Mock ersetzt</a:t>
+            </a:r>
+          </a:p>
+          <a:p>
+            <a:pPr lvl="1"/>
+            <a:r>
+              <a:rPr lang="de-DE" dirty="0"/>
+              <a:t>Natürlich sind nicht auf Anhieb alle Tests grün</a:t>
+            </a:r>
+          </a:p>
+          <a:p>
+            <a:pPr lvl="1"/>
+            <a:r>
+              <a:rPr lang="de-DE" dirty="0"/>
+              <a:t>Das sehe ich als gute Sache, da ich so tiefer in die Tests reinschauen muss und besser verstehe, wie alles funktioniert. 2047 != „2047“</a:t>
+            </a:r>
+          </a:p>
+          <a:p>
+            <a:pPr lvl="1"/>
+            <a:r>
+              <a:rPr lang="de-DE" dirty="0"/>
+              <a:t>Schwierigkeit: AI will immer alles in einem Schritt fixen, da komme ich selbst geistig nur schwer hinterher. Ich sage AI also, dass wir das Fehler für Fehler abarbeiten. Langsamer, aber in dem Schritt ist </a:t>
+            </a:r>
+            <a:r>
+              <a:rPr lang="de-DE" dirty="0" err="1"/>
+              <a:t>korrektheit</a:t>
+            </a:r>
+            <a:r>
+              <a:rPr lang="de-DE" dirty="0"/>
+              <a:t> wichtiger.</a:t>
+            </a:r>
+          </a:p>
+          <a:p>
+            <a:pPr lvl="1"/>
+            <a:r>
+              <a:rPr lang="de-DE" dirty="0"/>
+              <a:t>AI nutzt einige </a:t>
+            </a:r>
+            <a:r>
+              <a:rPr lang="de-DE" dirty="0" err="1"/>
+              <a:t>funktionen</a:t>
+            </a:r>
+            <a:r>
+              <a:rPr lang="de-DE" dirty="0"/>
+              <a:t> / Möglichkeiten von Robot Framework, die ich noch nicht kannte. </a:t>
+            </a:r>
+            <a:br>
+              <a:rPr lang="de-DE" dirty="0"/>
+            </a:br>
+            <a:r>
+              <a:rPr lang="de-DE" dirty="0"/>
+              <a:t>Hier lerne ich (wie beabsichtigt) viel dazu.</a:t>
+            </a:r>
+          </a:p>
+          <a:p>
+            <a:pPr lvl="1"/>
+            <a:endParaRPr lang="de-DE" dirty="0"/>
+          </a:p>
+        </p:txBody>
+      </p:sp>
+      <p:sp>
+        <p:nvSpPr>
+          <p:cNvPr id="4" name="Datumsplatzhalter 3">
+            <a:extLst>
+              <a:ext uri="{FF2B5EF4-FFF2-40B4-BE49-F238E27FC236}">
+                <a16:creationId xmlns:a16="http://schemas.microsoft.com/office/drawing/2014/main" id="{251EFF43-0860-3F27-019D-727E28D2EA80}"/>
+              </a:ext>
+            </a:extLst>
+          </p:cNvPr>
+          <p:cNvSpPr>
+            <a:spLocks noGrp="1"/>
+          </p:cNvSpPr>
+          <p:nvPr>
+            <p:ph type="dt" sz="half" idx="2"/>
+          </p:nvPr>
+        </p:nvSpPr>
+        <p:spPr/>
+        <p:txBody>
+          <a:bodyPr/>
+          <a:lstStyle/>
+          <a:p>
+            <a:fld id="{A4055450-52AE-4C8B-9714-2843C81CF833}" type="datetime1">
+              <a:rPr lang="de-DE" smtClean="0"/>
+              <a:t>02.09.2026</a:t>
+            </a:fld>
+            <a:endParaRPr lang="de-DE" dirty="0"/>
+          </a:p>
+        </p:txBody>
+      </p:sp>
+      <p:sp>
+        <p:nvSpPr>
+          <p:cNvPr id="5" name="Titel 4">
+            <a:extLst>
+              <a:ext uri="{FF2B5EF4-FFF2-40B4-BE49-F238E27FC236}">
+                <a16:creationId xmlns:a16="http://schemas.microsoft.com/office/drawing/2014/main" id="{08B60D5A-EFA9-E563-47C2-1834C51ACD89}"/>
+              </a:ext>
+            </a:extLst>
+          </p:cNvPr>
+          <p:cNvSpPr>
+            <a:spLocks noGrp="1"/>
+          </p:cNvSpPr>
+          <p:nvPr>
+            <p:ph type="title"/>
+          </p:nvPr>
+        </p:nvSpPr>
+        <p:spPr/>
+        <p:txBody>
+          <a:bodyPr/>
+          <a:lstStyle/>
+          <a:p>
+            <a:r>
+              <a:rPr lang="de-DE" dirty="0"/>
+              <a:t>REST-API </a:t>
+            </a:r>
+            <a:r>
+              <a:rPr lang="de-DE" dirty="0" err="1"/>
+              <a:t>Conctract</a:t>
+            </a:r>
+            <a:endParaRPr lang="de-DE" dirty="0"/>
+          </a:p>
+        </p:txBody>
+      </p:sp>
+      <p:sp>
+        <p:nvSpPr>
+          <p:cNvPr id="6" name="Foliennummernplatzhalter 5">
+            <a:extLst>
+              <a:ext uri="{FF2B5EF4-FFF2-40B4-BE49-F238E27FC236}">
+                <a16:creationId xmlns:a16="http://schemas.microsoft.com/office/drawing/2014/main" id="{43FDC28A-A128-4148-E142-F7719E65AA0E}"/>
+              </a:ext>
+            </a:extLst>
+          </p:cNvPr>
+          <p:cNvSpPr>
+            <a:spLocks noGrp="1"/>
+          </p:cNvSpPr>
+          <p:nvPr>
+            <p:ph type="sldNum" sz="quarter" idx="4"/>
+          </p:nvPr>
+        </p:nvSpPr>
+        <p:spPr/>
+        <p:txBody>
+          <a:bodyPr/>
+          <a:lstStyle/>
+          <a:p>
+            <a:fld id="{369A084B-84B6-4F15-B0F5-CCDC4176846B}" type="slidenum">
+              <a:rPr lang="de-DE" smtClean="0"/>
+              <a:pPr/>
+              <a:t>17</a:t>
+            </a:fld>
+            <a:endParaRPr lang="de-DE" dirty="0"/>
+          </a:p>
+        </p:txBody>
+      </p:sp>
+    </p:spTree>
+    <p:extLst>
+      <p:ext uri="{BB962C8B-B14F-4D97-AF65-F5344CB8AC3E}">
+        <p14:creationId xmlns:p14="http://schemas.microsoft.com/office/powerpoint/2010/main" val="175935516"/>
+      </p:ext>
+    </p:extLst>
+  </p:cSld>
+  <p:clrMapOvr>
+    <a:masterClrMapping/>
+  </p:clrMapOvr>
+</p:sld>
+</file>
+
+<file path=ppt/slides/slide18.xml><?xml version="1.0" encoding="utf-8"?>
+<p:sld xmlns:a="http://schemas.openxmlformats.org/drawingml/2006/main" xmlns:r="http://schemas.openxmlformats.org/officeDocument/2006/relationships" xmlns:p="http://schemas.openxmlformats.org/presentationml/2006/main">
+  <p:cSld>
+    <p:spTree>
+      <p:nvGrpSpPr>
+        <p:cNvPr id="1" name=""/>
+        <p:cNvGrpSpPr/>
+        <p:nvPr/>
+      </p:nvGrpSpPr>
+      <p:grpSpPr>
+        <a:xfrm>
+          <a:off x="0" y="0"/>
+          <a:ext cx="0" cy="0"/>
+          <a:chOff x="0" y="0"/>
+          <a:chExt cx="0" cy="0"/>
+        </a:xfrm>
+      </p:grpSpPr>
+      <p:sp>
+        <p:nvSpPr>
+          <p:cNvPr id="2" name="Fußzeilenplatzhalter 1">
+            <a:extLst>
+              <a:ext uri="{FF2B5EF4-FFF2-40B4-BE49-F238E27FC236}">
+                <a16:creationId xmlns:a16="http://schemas.microsoft.com/office/drawing/2014/main" id="{21C85E99-4252-A6F8-A2F1-C103ED0C3892}"/>
+              </a:ext>
+            </a:extLst>
+          </p:cNvPr>
+          <p:cNvSpPr>
+            <a:spLocks noGrp="1"/>
+          </p:cNvSpPr>
+          <p:nvPr>
+            <p:ph type="ftr" sz="quarter" idx="3"/>
+          </p:nvPr>
+        </p:nvSpPr>
+        <p:spPr/>
+        <p:txBody>
+          <a:bodyPr/>
+          <a:lstStyle/>
+          <a:p>
+            <a:r>
+              <a:rPr lang="de-DE"/>
+              <a:t>Unternehmensmaster Smart Mechatronics</a:t>
+            </a:r>
+            <a:endParaRPr lang="de-DE" dirty="0"/>
+          </a:p>
+        </p:txBody>
+      </p:sp>
+      <p:sp>
+        <p:nvSpPr>
+          <p:cNvPr id="3" name="Inhaltsplatzhalter 2">
+            <a:extLst>
+              <a:ext uri="{FF2B5EF4-FFF2-40B4-BE49-F238E27FC236}">
+                <a16:creationId xmlns:a16="http://schemas.microsoft.com/office/drawing/2014/main" id="{C7BF1C78-71A2-C371-06B0-BC087A20A8DA}"/>
+              </a:ext>
+            </a:extLst>
+          </p:cNvPr>
+          <p:cNvSpPr>
+            <a:spLocks noGrp="1"/>
+          </p:cNvSpPr>
+          <p:nvPr>
+            <p:ph idx="1"/>
+          </p:nvPr>
+        </p:nvSpPr>
+        <p:spPr/>
+        <p:txBody>
+          <a:bodyPr/>
+          <a:lstStyle/>
+          <a:p>
+            <a:r>
+              <a:rPr lang="de-DE" dirty="0"/>
+              <a:t>GUI ist Zentrales Element der </a:t>
+            </a:r>
+            <a:r>
+              <a:rPr lang="de-DE" dirty="0" err="1"/>
+              <a:t>software</a:t>
+            </a:r>
+            <a:r>
+              <a:rPr lang="de-DE" dirty="0"/>
+              <a:t>.</a:t>
+            </a:r>
+          </a:p>
+          <a:p>
+            <a:r>
+              <a:rPr lang="de-DE" dirty="0"/>
+              <a:t>Loopback-Communication ist aktiviert, funktioniert aber nicht.</a:t>
+            </a:r>
+          </a:p>
+          <a:p>
+            <a:r>
+              <a:rPr lang="de-DE" dirty="0"/>
+              <a:t>CAN-Communication muss reaktiviert werden</a:t>
+            </a:r>
+          </a:p>
+          <a:p>
+            <a:pPr lvl="1"/>
+            <a:r>
+              <a:rPr lang="de-DE" dirty="0">
+                <a:sym typeface="Wingdings" panose="05000000000000000000" pitchFamily="2" charset="2"/>
+              </a:rPr>
+              <a:t> hier sind wir in der Archäologie!</a:t>
+            </a:r>
+          </a:p>
+          <a:p>
+            <a:pPr lvl="1"/>
+            <a:r>
+              <a:rPr lang="de-DE" dirty="0">
+                <a:sym typeface="Wingdings" panose="05000000000000000000" pitchFamily="2" charset="2"/>
+              </a:rPr>
+              <a:t>AI unterstützt bei der Analyse</a:t>
+            </a:r>
+          </a:p>
+          <a:p>
+            <a:r>
+              <a:rPr lang="de-DE" dirty="0"/>
+              <a:t>Selbst für die einfachste Inbetriebnahme muss eine Menge umgebaut werden.</a:t>
+            </a:r>
+          </a:p>
+          <a:p>
+            <a:pPr lvl="1"/>
+            <a:r>
+              <a:rPr lang="de-DE" dirty="0">
+                <a:sym typeface="Wingdings" panose="05000000000000000000" pitchFamily="2" charset="2"/>
+              </a:rPr>
+              <a:t>Mein Plan:</a:t>
+            </a:r>
+          </a:p>
+          <a:p>
+            <a:pPr lvl="2"/>
+            <a:r>
+              <a:rPr lang="de-DE" dirty="0">
+                <a:sym typeface="Wingdings" panose="05000000000000000000" pitchFamily="2" charset="2"/>
+              </a:rPr>
+              <a:t>Statt </a:t>
+            </a:r>
+            <a:r>
+              <a:rPr lang="de-DE" dirty="0" err="1">
+                <a:sym typeface="Wingdings" panose="05000000000000000000" pitchFamily="2" charset="2"/>
+              </a:rPr>
+              <a:t>myGUIClass</a:t>
+            </a:r>
+            <a:r>
+              <a:rPr lang="de-DE" dirty="0">
+                <a:sym typeface="Wingdings" panose="05000000000000000000" pitchFamily="2" charset="2"/>
+              </a:rPr>
+              <a:t> wird ein neuer Scheduler / </a:t>
+            </a:r>
+            <a:r>
+              <a:rPr lang="de-DE" dirty="0" err="1">
+                <a:sym typeface="Wingdings" panose="05000000000000000000" pitchFamily="2" charset="2"/>
+              </a:rPr>
+              <a:t>datenhandler</a:t>
+            </a:r>
+            <a:r>
+              <a:rPr lang="de-DE" dirty="0">
+                <a:sym typeface="Wingdings" panose="05000000000000000000" pitchFamily="2" charset="2"/>
+              </a:rPr>
+              <a:t> benötigt</a:t>
+            </a:r>
+          </a:p>
+          <a:p>
+            <a:pPr lvl="2"/>
+            <a:r>
+              <a:rPr lang="de-DE" dirty="0"/>
+              <a:t>Statt GUI-Steuerung werden einzelne Werte auf Konsole gekippt?</a:t>
+            </a:r>
+          </a:p>
+          <a:p>
+            <a:pPr lvl="2"/>
+            <a:r>
+              <a:rPr lang="de-DE" dirty="0"/>
+              <a:t>Implementierung mittels remote Debugging auf </a:t>
+            </a:r>
+            <a:r>
+              <a:rPr lang="de-DE" dirty="0" err="1"/>
+              <a:t>pcberry</a:t>
+            </a:r>
+            <a:endParaRPr lang="de-DE" dirty="0"/>
+          </a:p>
+          <a:p>
+            <a:pPr lvl="2"/>
+            <a:r>
+              <a:rPr lang="de-DE" dirty="0"/>
+              <a:t>Development </a:t>
+            </a:r>
+            <a:r>
+              <a:rPr lang="de-DE" dirty="0" err="1"/>
+              <a:t>auserhalb</a:t>
+            </a:r>
+            <a:r>
+              <a:rPr lang="de-DE" dirty="0"/>
+              <a:t> vom </a:t>
+            </a:r>
+            <a:r>
+              <a:rPr lang="de-DE" dirty="0" err="1"/>
+              <a:t>pcberry</a:t>
+            </a:r>
+            <a:r>
+              <a:rPr lang="de-DE" dirty="0"/>
+              <a:t> ist schwierig da für laufende Tests die </a:t>
+            </a:r>
+            <a:r>
+              <a:rPr lang="de-DE" dirty="0" err="1"/>
+              <a:t>hardwareverbindung</a:t>
+            </a:r>
+            <a:r>
+              <a:rPr lang="de-DE" dirty="0"/>
+              <a:t> zum CAN unabdingbar ist</a:t>
+            </a:r>
+          </a:p>
+          <a:p>
+            <a:pPr lvl="2"/>
+            <a:r>
+              <a:rPr lang="de-DE" dirty="0"/>
+              <a:t>SSH scheint nicht besonders schnell zu sein (oder besonders stabil)</a:t>
+            </a:r>
+          </a:p>
+          <a:p>
+            <a:pPr lvl="3"/>
+            <a:r>
+              <a:rPr lang="de-DE" dirty="0"/>
+              <a:t>Zumindest nicht mit manueller Passworteingabe.</a:t>
+            </a:r>
+          </a:p>
+          <a:p>
+            <a:pPr lvl="2"/>
+            <a:r>
+              <a:rPr lang="de-DE" dirty="0"/>
+              <a:t>Mittelmäßige Planungen sind schwierig mit KI. Hier bedarf es externer Dokumente, in denen der Plan festgehalten und aktualisiert wird.</a:t>
+            </a:r>
+          </a:p>
+          <a:p>
+            <a:pPr lvl="2"/>
+            <a:endParaRPr lang="de-DE" dirty="0"/>
+          </a:p>
+          <a:p>
+            <a:pPr lvl="2"/>
+            <a:endParaRPr lang="de-DE" dirty="0"/>
+          </a:p>
+        </p:txBody>
+      </p:sp>
+      <p:sp>
+        <p:nvSpPr>
+          <p:cNvPr id="4" name="Datumsplatzhalter 3">
+            <a:extLst>
+              <a:ext uri="{FF2B5EF4-FFF2-40B4-BE49-F238E27FC236}">
+                <a16:creationId xmlns:a16="http://schemas.microsoft.com/office/drawing/2014/main" id="{241070AC-6777-0FD4-EA6E-8A9E7FFFEF6C}"/>
+              </a:ext>
+            </a:extLst>
+          </p:cNvPr>
+          <p:cNvSpPr>
+            <a:spLocks noGrp="1"/>
+          </p:cNvSpPr>
+          <p:nvPr>
+            <p:ph type="dt" sz="half" idx="2"/>
+          </p:nvPr>
+        </p:nvSpPr>
+        <p:spPr/>
+        <p:txBody>
+          <a:bodyPr/>
+          <a:lstStyle/>
+          <a:p>
+            <a:fld id="{A4055450-52AE-4C8B-9714-2843C81CF833}" type="datetime1">
+              <a:rPr lang="de-DE" smtClean="0"/>
+              <a:t>03.09.2026</a:t>
+            </a:fld>
+            <a:endParaRPr lang="de-DE" dirty="0"/>
+          </a:p>
+        </p:txBody>
+      </p:sp>
+      <p:sp>
+        <p:nvSpPr>
+          <p:cNvPr id="5" name="Titel 4">
+            <a:extLst>
+              <a:ext uri="{FF2B5EF4-FFF2-40B4-BE49-F238E27FC236}">
+                <a16:creationId xmlns:a16="http://schemas.microsoft.com/office/drawing/2014/main" id="{8D98EB89-B98F-0690-DBF0-37C7A791AAD8}"/>
+              </a:ext>
+            </a:extLst>
+          </p:cNvPr>
+          <p:cNvSpPr>
+            <a:spLocks noGrp="1"/>
+          </p:cNvSpPr>
+          <p:nvPr>
+            <p:ph type="title"/>
+          </p:nvPr>
+        </p:nvSpPr>
+        <p:spPr/>
+        <p:txBody>
+          <a:bodyPr/>
+          <a:lstStyle/>
+          <a:p>
+            <a:r>
+              <a:rPr lang="de-DE" dirty="0" err="1"/>
+              <a:t>Denkste</a:t>
+            </a:r>
+            <a:r>
+              <a:rPr lang="de-DE" dirty="0"/>
+              <a:t>!</a:t>
+            </a:r>
+          </a:p>
+        </p:txBody>
+      </p:sp>
+      <p:sp>
+        <p:nvSpPr>
+          <p:cNvPr id="6" name="Foliennummernplatzhalter 5">
+            <a:extLst>
+              <a:ext uri="{FF2B5EF4-FFF2-40B4-BE49-F238E27FC236}">
+                <a16:creationId xmlns:a16="http://schemas.microsoft.com/office/drawing/2014/main" id="{2A91A111-AE6C-2E72-C195-4EA7A5674F2D}"/>
+              </a:ext>
+            </a:extLst>
+          </p:cNvPr>
+          <p:cNvSpPr>
+            <a:spLocks noGrp="1"/>
+          </p:cNvSpPr>
+          <p:nvPr>
+            <p:ph type="sldNum" sz="quarter" idx="4"/>
+          </p:nvPr>
+        </p:nvSpPr>
+        <p:spPr/>
+        <p:txBody>
+          <a:bodyPr/>
+          <a:lstStyle/>
+          <a:p>
+            <a:fld id="{369A084B-84B6-4F15-B0F5-CCDC4176846B}" type="slidenum">
+              <a:rPr lang="de-DE" smtClean="0"/>
+              <a:pPr/>
+              <a:t>18</a:t>
+            </a:fld>
+            <a:endParaRPr lang="de-DE" dirty="0"/>
+          </a:p>
+        </p:txBody>
+      </p:sp>
+    </p:spTree>
+    <p:extLst>
+      <p:ext uri="{BB962C8B-B14F-4D97-AF65-F5344CB8AC3E}">
+        <p14:creationId xmlns:p14="http://schemas.microsoft.com/office/powerpoint/2010/main" val="2872081242"/>
+      </p:ext>
+    </p:extLst>
+  </p:cSld>
+  <p:clrMapOvr>
+    <a:masterClrMapping/>
+  </p:clrMapOvr>
+</p:sld>
+</file>
+
+<file path=ppt/slides/slide19.xml><?xml version="1.0" encoding="utf-8"?>
+<p:sld xmlns:a="http://schemas.openxmlformats.org/drawingml/2006/main" xmlns:r="http://schemas.openxmlformats.org/officeDocument/2006/relationships" xmlns:p="http://schemas.openxmlformats.org/presentationml/2006/main">
+  <p:cSld>
+    <p:spTree>
+      <p:nvGrpSpPr>
+        <p:cNvPr id="1" name=""/>
+        <p:cNvGrpSpPr/>
+        <p:nvPr/>
+      </p:nvGrpSpPr>
+      <p:grpSpPr>
+        <a:xfrm>
+          <a:off x="0" y="0"/>
+          <a:ext cx="0" cy="0"/>
+          <a:chOff x="0" y="0"/>
+          <a:chExt cx="0" cy="0"/>
+        </a:xfrm>
+      </p:grpSpPr>
+      <p:sp>
+        <p:nvSpPr>
+          <p:cNvPr id="2" name="Fußzeilenplatzhalter 1">
+            <a:extLst>
+              <a:ext uri="{FF2B5EF4-FFF2-40B4-BE49-F238E27FC236}">
+                <a16:creationId xmlns:a16="http://schemas.microsoft.com/office/drawing/2014/main" id="{4F358410-6B38-80F0-09CA-2A91C5F4840E}"/>
+              </a:ext>
+            </a:extLst>
+          </p:cNvPr>
+          <p:cNvSpPr>
+            <a:spLocks noGrp="1"/>
+          </p:cNvSpPr>
+          <p:nvPr>
+            <p:ph type="ftr" sz="quarter" idx="3"/>
+          </p:nvPr>
+        </p:nvSpPr>
+        <p:spPr/>
+        <p:txBody>
+          <a:bodyPr/>
+          <a:lstStyle/>
+          <a:p>
+            <a:r>
+              <a:rPr lang="de-DE"/>
+              <a:t>Unternehmensmaster Smart Mechatronics</a:t>
+            </a:r>
+            <a:endParaRPr lang="de-DE" dirty="0"/>
+          </a:p>
+        </p:txBody>
+      </p:sp>
+      <p:sp>
+        <p:nvSpPr>
+          <p:cNvPr id="3" name="Inhaltsplatzhalter 2">
+            <a:extLst>
+              <a:ext uri="{FF2B5EF4-FFF2-40B4-BE49-F238E27FC236}">
+                <a16:creationId xmlns:a16="http://schemas.microsoft.com/office/drawing/2014/main" id="{CCA37534-BA3A-ADBD-DBB5-D33E8336DF87}"/>
+              </a:ext>
+            </a:extLst>
+          </p:cNvPr>
+          <p:cNvSpPr>
+            <a:spLocks noGrp="1"/>
+          </p:cNvSpPr>
+          <p:nvPr>
+            <p:ph idx="1"/>
+          </p:nvPr>
+        </p:nvSpPr>
+        <p:spPr/>
+        <p:txBody>
+          <a:bodyPr/>
+          <a:lstStyle/>
+          <a:p>
+            <a:r>
+              <a:rPr lang="de-DE" dirty="0"/>
+              <a:t>Milestone 1: </a:t>
+            </a:r>
+          </a:p>
+          <a:p>
+            <a:pPr lvl="1"/>
+            <a:r>
+              <a:rPr lang="de-DE" dirty="0"/>
+              <a:t>CAN-Nachrichten werden gelesen und auf Konsole gekippt.</a:t>
+            </a:r>
+          </a:p>
+          <a:p>
+            <a:pPr lvl="1"/>
+            <a:r>
+              <a:rPr lang="de-DE" dirty="0" err="1"/>
+              <a:t>Prerequesite</a:t>
+            </a:r>
+            <a:r>
+              <a:rPr lang="de-DE" dirty="0"/>
+              <a:t>: CAN funktioniert</a:t>
+            </a:r>
+          </a:p>
+          <a:p>
+            <a:pPr lvl="1"/>
+            <a:r>
+              <a:rPr lang="de-DE" dirty="0"/>
+              <a:t>Schritte:</a:t>
+            </a:r>
+          </a:p>
+          <a:p>
+            <a:pPr lvl="2"/>
+            <a:r>
+              <a:rPr lang="de-DE" dirty="0"/>
+              <a:t>CAN </a:t>
+            </a:r>
+            <a:r>
+              <a:rPr lang="de-DE" dirty="0" err="1"/>
+              <a:t>ausserhalb</a:t>
+            </a:r>
+            <a:r>
+              <a:rPr lang="de-DE" dirty="0"/>
+              <a:t> von </a:t>
+            </a:r>
+            <a:r>
+              <a:rPr lang="de-DE" dirty="0" err="1"/>
+              <a:t>python</a:t>
+            </a:r>
+            <a:r>
+              <a:rPr lang="de-DE" dirty="0"/>
+              <a:t> prüfen</a:t>
+            </a:r>
+          </a:p>
+          <a:p>
+            <a:pPr lvl="3"/>
+            <a:endParaRPr lang="de-DE" dirty="0"/>
+          </a:p>
+          <a:p>
+            <a:pPr lvl="3"/>
+            <a:endParaRPr lang="de-DE" dirty="0"/>
+          </a:p>
+          <a:p>
+            <a:pPr lvl="3"/>
+            <a:endParaRPr lang="de-DE" dirty="0"/>
+          </a:p>
+          <a:p>
+            <a:pPr lvl="3"/>
+            <a:endParaRPr lang="de-DE" dirty="0"/>
+          </a:p>
+          <a:p>
+            <a:pPr lvl="3"/>
+            <a:endParaRPr lang="de-DE" dirty="0"/>
+          </a:p>
+          <a:p>
+            <a:pPr lvl="3"/>
+            <a:endParaRPr lang="de-DE" dirty="0"/>
+          </a:p>
+          <a:p>
+            <a:pPr lvl="3"/>
+            <a:endParaRPr lang="de-DE" dirty="0"/>
+          </a:p>
+          <a:p>
+            <a:pPr lvl="3"/>
+            <a:endParaRPr lang="de-DE" dirty="0"/>
+          </a:p>
+          <a:p>
+            <a:pPr lvl="2"/>
+            <a:r>
+              <a:rPr lang="de-DE" dirty="0"/>
+              <a:t>Trennen von </a:t>
+            </a:r>
+            <a:r>
+              <a:rPr lang="de-DE" dirty="0" err="1"/>
+              <a:t>pccoms</a:t>
+            </a:r>
+            <a:r>
+              <a:rPr lang="de-DE" dirty="0"/>
+              <a:t> und </a:t>
+            </a:r>
+            <a:r>
+              <a:rPr lang="de-DE" dirty="0" err="1"/>
+              <a:t>tkinter</a:t>
+            </a:r>
+            <a:r>
+              <a:rPr lang="de-DE" dirty="0"/>
+              <a:t> / </a:t>
+            </a:r>
+            <a:r>
+              <a:rPr lang="de-DE" dirty="0" err="1"/>
+              <a:t>scheduling</a:t>
+            </a:r>
+            <a:endParaRPr lang="de-DE" dirty="0"/>
+          </a:p>
+          <a:p>
+            <a:pPr lvl="3"/>
+            <a:r>
+              <a:rPr lang="de-DE" dirty="0"/>
+              <a:t>Erstmal </a:t>
+            </a:r>
+            <a:r>
+              <a:rPr lang="de-DE" dirty="0" err="1"/>
+              <a:t>Standalone</a:t>
+            </a:r>
+            <a:r>
+              <a:rPr lang="de-DE" dirty="0"/>
+              <a:t> CAN-monitor</a:t>
+            </a:r>
+          </a:p>
+          <a:p>
+            <a:pPr lvl="3"/>
+            <a:r>
+              <a:rPr lang="de-DE" dirty="0"/>
+              <a:t>KI baut das schon. TDD kann hier nicht genutzt werden weil an den </a:t>
+            </a:r>
+            <a:r>
+              <a:rPr lang="de-DE" dirty="0" err="1"/>
+              <a:t>schnittstellen</a:t>
+            </a:r>
+            <a:r>
+              <a:rPr lang="de-DE" dirty="0"/>
+              <a:t> (Hardware) nicht sauber stimuliert werden kann. Korrektheit muss durch Review sichergestellt werden.</a:t>
+            </a:r>
+          </a:p>
+        </p:txBody>
+      </p:sp>
+      <p:sp>
+        <p:nvSpPr>
+          <p:cNvPr id="4" name="Datumsplatzhalter 3">
+            <a:extLst>
+              <a:ext uri="{FF2B5EF4-FFF2-40B4-BE49-F238E27FC236}">
+                <a16:creationId xmlns:a16="http://schemas.microsoft.com/office/drawing/2014/main" id="{29CFBA23-55D1-293A-8253-C67202B5CBF8}"/>
+              </a:ext>
+            </a:extLst>
+          </p:cNvPr>
+          <p:cNvSpPr>
+            <a:spLocks noGrp="1"/>
+          </p:cNvSpPr>
+          <p:nvPr>
+            <p:ph type="dt" sz="half" idx="2"/>
+          </p:nvPr>
+        </p:nvSpPr>
+        <p:spPr/>
+        <p:txBody>
+          <a:bodyPr/>
+          <a:lstStyle/>
+          <a:p>
+            <a:fld id="{A4055450-52AE-4C8B-9714-2843C81CF833}" type="datetime1">
+              <a:rPr lang="de-DE" smtClean="0"/>
+              <a:t>05.09.2026</a:t>
+            </a:fld>
+            <a:endParaRPr lang="de-DE" dirty="0"/>
+          </a:p>
+        </p:txBody>
+      </p:sp>
+      <p:sp>
+        <p:nvSpPr>
+          <p:cNvPr id="5" name="Titel 4">
+            <a:extLst>
+              <a:ext uri="{FF2B5EF4-FFF2-40B4-BE49-F238E27FC236}">
+                <a16:creationId xmlns:a16="http://schemas.microsoft.com/office/drawing/2014/main" id="{C583DD0E-9F8A-0442-116F-DA0A28136753}"/>
+              </a:ext>
+            </a:extLst>
+          </p:cNvPr>
+          <p:cNvSpPr>
+            <a:spLocks noGrp="1"/>
+          </p:cNvSpPr>
+          <p:nvPr>
+            <p:ph type="title"/>
+          </p:nvPr>
+        </p:nvSpPr>
+        <p:spPr/>
+        <p:txBody>
+          <a:bodyPr/>
+          <a:lstStyle/>
+          <a:p>
+            <a:r>
+              <a:rPr lang="de-DE" dirty="0" err="1"/>
+              <a:t>Refactoring</a:t>
+            </a:r>
+            <a:endParaRPr lang="de-DE" dirty="0"/>
+          </a:p>
+        </p:txBody>
+      </p:sp>
+      <p:sp>
+        <p:nvSpPr>
+          <p:cNvPr id="6" name="Foliennummernplatzhalter 5">
+            <a:extLst>
+              <a:ext uri="{FF2B5EF4-FFF2-40B4-BE49-F238E27FC236}">
+                <a16:creationId xmlns:a16="http://schemas.microsoft.com/office/drawing/2014/main" id="{7E985838-9EDB-A302-D132-056739D8983B}"/>
+              </a:ext>
+            </a:extLst>
+          </p:cNvPr>
+          <p:cNvSpPr>
+            <a:spLocks noGrp="1"/>
+          </p:cNvSpPr>
+          <p:nvPr>
+            <p:ph type="sldNum" sz="quarter" idx="4"/>
+          </p:nvPr>
+        </p:nvSpPr>
+        <p:spPr/>
+        <p:txBody>
+          <a:bodyPr/>
+          <a:lstStyle/>
+          <a:p>
+            <a:fld id="{369A084B-84B6-4F15-B0F5-CCDC4176846B}" type="slidenum">
+              <a:rPr lang="de-DE" smtClean="0"/>
+              <a:pPr/>
+              <a:t>19</a:t>
+            </a:fld>
+            <a:endParaRPr lang="de-DE" dirty="0"/>
+          </a:p>
+        </p:txBody>
+      </p:sp>
+      <p:pic>
+        <p:nvPicPr>
+          <p:cNvPr id="8" name="Grafik 7">
+            <a:extLst>
+              <a:ext uri="{FF2B5EF4-FFF2-40B4-BE49-F238E27FC236}">
+                <a16:creationId xmlns:a16="http://schemas.microsoft.com/office/drawing/2014/main" id="{A5CFE3A8-9C59-F49B-5D50-2871E0BD588B}"/>
+              </a:ext>
+            </a:extLst>
+          </p:cNvPr>
+          <p:cNvPicPr>
+            <a:picLocks noChangeAspect="1"/>
+          </p:cNvPicPr>
+          <p:nvPr/>
+        </p:nvPicPr>
+        <p:blipFill>
+          <a:blip r:embed="rId2"/>
+          <a:stretch>
+            <a:fillRect/>
+          </a:stretch>
+        </p:blipFill>
+        <p:spPr>
+          <a:xfrm>
+            <a:off x="6816080" y="2067560"/>
+            <a:ext cx="3997419" cy="2722880"/>
+          </a:xfrm>
+          <a:prstGeom prst="rect">
+            <a:avLst/>
+          </a:prstGeom>
+        </p:spPr>
+      </p:pic>
+    </p:spTree>
+    <p:extLst>
+      <p:ext uri="{BB962C8B-B14F-4D97-AF65-F5344CB8AC3E}">
+        <p14:creationId xmlns:p14="http://schemas.microsoft.com/office/powerpoint/2010/main" val="258116892"/>
       </p:ext>
     </p:extLst>
   </p:cSld>
@@ -31660,6 +33232,217 @@
     <p:extLst>
       <p:ext uri="{BB962C8B-B14F-4D97-AF65-F5344CB8AC3E}">
         <p14:creationId xmlns:p14="http://schemas.microsoft.com/office/powerpoint/2010/main" val="877716438"/>
+      </p:ext>
+    </p:extLst>
+  </p:cSld>
+  <p:clrMapOvr>
+    <a:masterClrMapping/>
+  </p:clrMapOvr>
+</p:sld>
+</file>
+
+<file path=ppt/slides/slide20.xml><?xml version="1.0" encoding="utf-8"?>
+<p:sld xmlns:a="http://schemas.openxmlformats.org/drawingml/2006/main" xmlns:r="http://schemas.openxmlformats.org/officeDocument/2006/relationships" xmlns:p="http://schemas.openxmlformats.org/presentationml/2006/main">
+  <p:cSld>
+    <p:spTree>
+      <p:nvGrpSpPr>
+        <p:cNvPr id="1" name=""/>
+        <p:cNvGrpSpPr/>
+        <p:nvPr/>
+      </p:nvGrpSpPr>
+      <p:grpSpPr>
+        <a:xfrm>
+          <a:off x="0" y="0"/>
+          <a:ext cx="0" cy="0"/>
+          <a:chOff x="0" y="0"/>
+          <a:chExt cx="0" cy="0"/>
+        </a:xfrm>
+      </p:grpSpPr>
+      <p:sp>
+        <p:nvSpPr>
+          <p:cNvPr id="2" name="Fußzeilenplatzhalter 1">
+            <a:extLst>
+              <a:ext uri="{FF2B5EF4-FFF2-40B4-BE49-F238E27FC236}">
+                <a16:creationId xmlns:a16="http://schemas.microsoft.com/office/drawing/2014/main" id="{F4E33CA2-9048-6A8A-97C0-66774138DD51}"/>
+              </a:ext>
+            </a:extLst>
+          </p:cNvPr>
+          <p:cNvSpPr>
+            <a:spLocks noGrp="1"/>
+          </p:cNvSpPr>
+          <p:nvPr>
+            <p:ph type="ftr" sz="quarter" idx="3"/>
+          </p:nvPr>
+        </p:nvSpPr>
+        <p:spPr/>
+        <p:txBody>
+          <a:bodyPr/>
+          <a:lstStyle/>
+          <a:p>
+            <a:r>
+              <a:rPr lang="de-DE"/>
+              <a:t>Unternehmensmaster Smart Mechatronics</a:t>
+            </a:r>
+            <a:endParaRPr lang="de-DE" dirty="0"/>
+          </a:p>
+        </p:txBody>
+      </p:sp>
+      <p:sp>
+        <p:nvSpPr>
+          <p:cNvPr id="3" name="Inhaltsplatzhalter 2">
+            <a:extLst>
+              <a:ext uri="{FF2B5EF4-FFF2-40B4-BE49-F238E27FC236}">
+                <a16:creationId xmlns:a16="http://schemas.microsoft.com/office/drawing/2014/main" id="{8C164AD5-AFDE-0FDD-1B41-5D8B2C438EB6}"/>
+              </a:ext>
+            </a:extLst>
+          </p:cNvPr>
+          <p:cNvSpPr>
+            <a:spLocks noGrp="1"/>
+          </p:cNvSpPr>
+          <p:nvPr>
+            <p:ph idx="1"/>
+          </p:nvPr>
+        </p:nvSpPr>
+        <p:spPr/>
+        <p:txBody>
+          <a:bodyPr/>
+          <a:lstStyle/>
+          <a:p>
+            <a:r>
+              <a:rPr lang="de-DE" dirty="0"/>
+              <a:t>Implementierung via KI sieht erstmal gut aus. KI will direkt auf meinem Laptop prüfen, </a:t>
+            </a:r>
+            <a:r>
+              <a:rPr lang="de-DE" dirty="0" err="1"/>
+              <a:t>obs</a:t>
+            </a:r>
+            <a:r>
+              <a:rPr lang="de-DE" dirty="0"/>
+              <a:t> geht… klappt natürlich nicht weil falsche Umgebung. Hier wäre remote </a:t>
+            </a:r>
+            <a:r>
+              <a:rPr lang="de-DE" dirty="0" err="1"/>
+              <a:t>debugging</a:t>
+            </a:r>
+            <a:r>
+              <a:rPr lang="de-DE" dirty="0"/>
+              <a:t> hilfreich!</a:t>
+            </a:r>
+          </a:p>
+          <a:p>
+            <a:r>
+              <a:rPr lang="de-DE" dirty="0"/>
+              <a:t>Ich prüfe manuell auf dem </a:t>
+            </a:r>
+            <a:r>
+              <a:rPr lang="de-DE" dirty="0" err="1"/>
+              <a:t>pcberry</a:t>
+            </a:r>
+            <a:r>
+              <a:rPr lang="de-DE" dirty="0"/>
+              <a:t>, es läuft </a:t>
+            </a:r>
+            <a:r>
+              <a:rPr lang="de-DE"/>
+              <a:t>auf anhieb.</a:t>
+            </a:r>
+          </a:p>
+          <a:p>
+            <a:endParaRPr lang="de-DE"/>
+          </a:p>
+        </p:txBody>
+      </p:sp>
+      <p:sp>
+        <p:nvSpPr>
+          <p:cNvPr id="4" name="Datumsplatzhalter 3">
+            <a:extLst>
+              <a:ext uri="{FF2B5EF4-FFF2-40B4-BE49-F238E27FC236}">
+                <a16:creationId xmlns:a16="http://schemas.microsoft.com/office/drawing/2014/main" id="{D8D82F0D-C63D-624E-F94E-F09B4C1ED284}"/>
+              </a:ext>
+            </a:extLst>
+          </p:cNvPr>
+          <p:cNvSpPr>
+            <a:spLocks noGrp="1"/>
+          </p:cNvSpPr>
+          <p:nvPr>
+            <p:ph type="dt" sz="half" idx="2"/>
+          </p:nvPr>
+        </p:nvSpPr>
+        <p:spPr/>
+        <p:txBody>
+          <a:bodyPr/>
+          <a:lstStyle/>
+          <a:p>
+            <a:fld id="{A4055450-52AE-4C8B-9714-2843C81CF833}" type="datetime1">
+              <a:rPr lang="de-DE" smtClean="0"/>
+              <a:t>05.09.2026</a:t>
+            </a:fld>
+            <a:endParaRPr lang="de-DE" dirty="0"/>
+          </a:p>
+        </p:txBody>
+      </p:sp>
+      <p:sp>
+        <p:nvSpPr>
+          <p:cNvPr id="5" name="Titel 4">
+            <a:extLst>
+              <a:ext uri="{FF2B5EF4-FFF2-40B4-BE49-F238E27FC236}">
+                <a16:creationId xmlns:a16="http://schemas.microsoft.com/office/drawing/2014/main" id="{8CFC8200-6D5F-6C42-0D0F-B421E6D5BE6D}"/>
+              </a:ext>
+            </a:extLst>
+          </p:cNvPr>
+          <p:cNvSpPr>
+            <a:spLocks noGrp="1"/>
+          </p:cNvSpPr>
+          <p:nvPr>
+            <p:ph type="title"/>
+          </p:nvPr>
+        </p:nvSpPr>
+        <p:spPr/>
+        <p:txBody>
+          <a:bodyPr/>
+          <a:lstStyle/>
+          <a:p>
+            <a:r>
+              <a:rPr lang="de-DE" dirty="0"/>
+              <a:t>Can_monitor.py</a:t>
+            </a:r>
+          </a:p>
+        </p:txBody>
+      </p:sp>
+      <p:sp>
+        <p:nvSpPr>
+          <p:cNvPr id="6" name="Foliennummernplatzhalter 5">
+            <a:extLst>
+              <a:ext uri="{FF2B5EF4-FFF2-40B4-BE49-F238E27FC236}">
+                <a16:creationId xmlns:a16="http://schemas.microsoft.com/office/drawing/2014/main" id="{FEC6749E-6C98-98C9-256A-D6240D96618B}"/>
+              </a:ext>
+            </a:extLst>
+          </p:cNvPr>
+          <p:cNvSpPr>
+            <a:spLocks noGrp="1"/>
+          </p:cNvSpPr>
+          <p:nvPr>
+            <p:ph type="sldNum" sz="quarter" idx="4"/>
+          </p:nvPr>
+        </p:nvSpPr>
+        <p:spPr/>
+        <p:txBody>
+          <a:bodyPr/>
+          <a:lstStyle/>
+          <a:p>
+            <a:fld id="{369A084B-84B6-4F15-B0F5-CCDC4176846B}" type="slidenum">
+              <a:rPr lang="de-DE" smtClean="0"/>
+              <a:pPr/>
+              <a:t>20</a:t>
+            </a:fld>
+            <a:endParaRPr lang="de-DE" dirty="0"/>
+          </a:p>
+        </p:txBody>
+      </p:sp>
+    </p:spTree>
+    <p:extLst>
+      <p:ext uri="{BB962C8B-B14F-4D97-AF65-F5344CB8AC3E}">
+        <p14:creationId xmlns:p14="http://schemas.microsoft.com/office/powerpoint/2010/main" val="2264229981"/>
       </p:ext>
     </p:extLst>
   </p:cSld>

--- a/Präsentation_Refactoring/Softwarearchäologie live.pptx
+++ b/Präsentation_Refactoring/Softwarearchäologie live.pptx
@@ -5,7 +5,7 @@
     <p:sldMasterId id="2147483829" r:id="rId6"/>
   </p:sldMasterIdLst>
   <p:notesMasterIdLst>
-    <p:notesMasterId r:id="rId27"/>
+    <p:notesMasterId r:id="rId29"/>
   </p:notesMasterIdLst>
   <p:sldIdLst>
     <p:sldId id="256" r:id="rId7"/>
@@ -28,6 +28,8 @@
     <p:sldId id="274" r:id="rId24"/>
     <p:sldId id="275" r:id="rId25"/>
     <p:sldId id="276" r:id="rId26"/>
+    <p:sldId id="277" r:id="rId27"/>
+    <p:sldId id="278" r:id="rId28"/>
   </p:sldIdLst>
   <p:sldSz cx="12192000" cy="6858000"/>
   <p:notesSz cx="6858000" cy="9144000"/>
@@ -181,6 +183,8 @@
             <p14:sldId id="274"/>
             <p14:sldId id="275"/>
             <p14:sldId id="276"/>
+            <p14:sldId id="277"/>
+            <p14:sldId id="278"/>
           </p14:sldIdLst>
         </p14:section>
       </p14:sectionLst>
@@ -33340,15 +33344,145 @@
             </a:r>
             <a:r>
               <a:rPr lang="de-DE" dirty="0"/>
-              <a:t>, es läuft </a:t>
-            </a:r>
-            <a:r>
-              <a:rPr lang="de-DE"/>
-              <a:t>auf anhieb.</a:t>
-            </a:r>
-          </a:p>
-          <a:p>
-            <a:endParaRPr lang="de-DE"/>
+              <a:t>, es läuft auf anhieb.</a:t>
+            </a:r>
+          </a:p>
+          <a:p>
+            <a:r>
+              <a:rPr lang="de-DE" dirty="0"/>
+              <a:t>Mein Gehirn plant zu langsam / zu kleinschrittig.</a:t>
+            </a:r>
+          </a:p>
+          <a:p>
+            <a:pPr lvl="1"/>
+            <a:r>
+              <a:rPr lang="de-DE" dirty="0"/>
+              <a:t>Was will ich denn als nächstes machen? Wo ist mein Big Picture / großer Plan?</a:t>
+            </a:r>
+          </a:p>
+          <a:p>
+            <a:pPr lvl="1"/>
+            <a:r>
+              <a:rPr lang="de-DE" dirty="0"/>
+              <a:t>KI hat den Plan im Speicher.</a:t>
+            </a:r>
+          </a:p>
+          <a:p>
+            <a:pPr lvl="1"/>
+            <a:r>
+              <a:rPr lang="de-DE" dirty="0"/>
+              <a:t>Nächster Schritt laut KI: </a:t>
+            </a:r>
+            <a:r>
+              <a:rPr lang="de-DE" dirty="0" err="1"/>
+              <a:t>Configuration</a:t>
+            </a:r>
+            <a:r>
+              <a:rPr lang="de-DE" dirty="0"/>
+              <a:t> einbinden</a:t>
+            </a:r>
+          </a:p>
+          <a:p>
+            <a:pPr lvl="1"/>
+            <a:r>
+              <a:rPr lang="de-DE" dirty="0"/>
+              <a:t>Gefühlt hätte ich das auch getan, mir fehlt aber der übernächste Schritt / große Plan zum Endprodukt.</a:t>
+            </a:r>
+          </a:p>
+          <a:p>
+            <a:pPr lvl="1"/>
+            <a:r>
+              <a:rPr lang="de-DE" dirty="0"/>
+              <a:t>Was ist der nächste Meilenstein? Der Ursprünglich erarbeitete </a:t>
+            </a:r>
+            <a:r>
+              <a:rPr lang="de-DE" dirty="0" err="1"/>
+              <a:t>Taskplan</a:t>
+            </a:r>
+            <a:r>
+              <a:rPr lang="de-DE" dirty="0"/>
+              <a:t> hilft nicht wirklich. Laut dem Plan bin ich Anfang November / 2 Monate in der Zukunft. (Hardware-test </a:t>
+            </a:r>
+            <a:r>
+              <a:rPr lang="de-DE" dirty="0" err="1"/>
+              <a:t>fixtures</a:t>
+            </a:r>
+            <a:r>
+              <a:rPr lang="de-DE" dirty="0"/>
+              <a:t> habe ich übersprungen)</a:t>
+            </a:r>
+            <a:br>
+              <a:rPr lang="de-DE" dirty="0"/>
+            </a:br>
+            <a:r>
+              <a:rPr lang="de-DE" dirty="0">
+                <a:sym typeface="Wingdings" panose="05000000000000000000" pitchFamily="2" charset="2"/>
+              </a:rPr>
+              <a:t> Aktueller Task: „</a:t>
+            </a:r>
+            <a:r>
+              <a:rPr lang="de-DE" dirty="0" err="1">
+                <a:sym typeface="Wingdings" panose="05000000000000000000" pitchFamily="2" charset="2"/>
+              </a:rPr>
+              <a:t>Process</a:t>
+            </a:r>
+            <a:r>
+              <a:rPr lang="de-DE" dirty="0">
+                <a:sym typeface="Wingdings" panose="05000000000000000000" pitchFamily="2" charset="2"/>
+              </a:rPr>
+              <a:t>-Control GUI and </a:t>
+            </a:r>
+            <a:r>
+              <a:rPr lang="de-DE" dirty="0" err="1">
+                <a:sym typeface="Wingdings" panose="05000000000000000000" pitchFamily="2" charset="2"/>
+              </a:rPr>
+              <a:t>logging</a:t>
+            </a:r>
+            <a:r>
+              <a:rPr lang="de-DE" dirty="0">
+                <a:sym typeface="Wingdings" panose="05000000000000000000" pitchFamily="2" charset="2"/>
+              </a:rPr>
+              <a:t>“. Nicht falsch, nicht hilfreich.</a:t>
+            </a:r>
+          </a:p>
+          <a:p>
+            <a:pPr lvl="1"/>
+            <a:r>
+              <a:rPr lang="de-DE" dirty="0"/>
+              <a:t>Meilenstein: Ich will </a:t>
+            </a:r>
+            <a:r>
+              <a:rPr lang="de-DE" dirty="0" err="1"/>
+              <a:t>Unittesten</a:t>
+            </a:r>
+            <a:r>
+              <a:rPr lang="de-DE" dirty="0"/>
+              <a:t> können. Auf meinem Windows-Laptop. Also wieder Infrastruktur / .</a:t>
+            </a:r>
+            <a:r>
+              <a:rPr lang="de-DE" dirty="0" err="1"/>
+              <a:t>venv</a:t>
+            </a:r>
+            <a:r>
+              <a:rPr lang="de-DE" dirty="0"/>
+              <a:t> aufsetzen. Oder verzichte ich darauf und arbeite direkt auf dem </a:t>
+            </a:r>
+            <a:r>
+              <a:rPr lang="de-DE" dirty="0" err="1"/>
+              <a:t>pcberry</a:t>
+            </a:r>
+            <a:r>
+              <a:rPr lang="de-DE" dirty="0"/>
+              <a:t>? Fragen und </a:t>
+            </a:r>
+            <a:r>
+              <a:rPr lang="de-DE" dirty="0" err="1"/>
+              <a:t>entscheidungen</a:t>
+            </a:r>
+            <a:r>
+              <a:rPr lang="de-DE" dirty="0"/>
+              <a:t> dauern länger als das eigentliche coden. Gefühl sagt: Wenn ich wüsste, was ich will, wäre ich längst fertig. </a:t>
+            </a:r>
           </a:p>
         </p:txBody>
       </p:sp>
@@ -33443,6 +33577,658 @@
     <p:extLst>
       <p:ext uri="{BB962C8B-B14F-4D97-AF65-F5344CB8AC3E}">
         <p14:creationId xmlns:p14="http://schemas.microsoft.com/office/powerpoint/2010/main" val="2264229981"/>
+      </p:ext>
+    </p:extLst>
+  </p:cSld>
+  <p:clrMapOvr>
+    <a:masterClrMapping/>
+  </p:clrMapOvr>
+</p:sld>
+</file>
+
+<file path=ppt/slides/slide21.xml><?xml version="1.0" encoding="utf-8"?>
+<p:sld xmlns:a="http://schemas.openxmlformats.org/drawingml/2006/main" xmlns:r="http://schemas.openxmlformats.org/officeDocument/2006/relationships" xmlns:p="http://schemas.openxmlformats.org/presentationml/2006/main">
+  <p:cSld>
+    <p:spTree>
+      <p:nvGrpSpPr>
+        <p:cNvPr id="1" name=""/>
+        <p:cNvGrpSpPr/>
+        <p:nvPr/>
+      </p:nvGrpSpPr>
+      <p:grpSpPr>
+        <a:xfrm>
+          <a:off x="0" y="0"/>
+          <a:ext cx="0" cy="0"/>
+          <a:chOff x="0" y="0"/>
+          <a:chExt cx="0" cy="0"/>
+        </a:xfrm>
+      </p:grpSpPr>
+      <p:sp>
+        <p:nvSpPr>
+          <p:cNvPr id="2" name="Fußzeilenplatzhalter 1">
+            <a:extLst>
+              <a:ext uri="{FF2B5EF4-FFF2-40B4-BE49-F238E27FC236}">
+                <a16:creationId xmlns:a16="http://schemas.microsoft.com/office/drawing/2014/main" id="{7764058C-9E81-6067-9C6A-F4A544D1A733}"/>
+              </a:ext>
+            </a:extLst>
+          </p:cNvPr>
+          <p:cNvSpPr>
+            <a:spLocks noGrp="1"/>
+          </p:cNvSpPr>
+          <p:nvPr>
+            <p:ph type="ftr" sz="quarter" idx="3"/>
+          </p:nvPr>
+        </p:nvSpPr>
+        <p:spPr/>
+        <p:txBody>
+          <a:bodyPr/>
+          <a:lstStyle/>
+          <a:p>
+            <a:r>
+              <a:rPr lang="de-DE"/>
+              <a:t>Unternehmensmaster Smart Mechatronics</a:t>
+            </a:r>
+            <a:endParaRPr lang="de-DE" dirty="0"/>
+          </a:p>
+        </p:txBody>
+      </p:sp>
+      <p:sp>
+        <p:nvSpPr>
+          <p:cNvPr id="3" name="Inhaltsplatzhalter 2">
+            <a:extLst>
+              <a:ext uri="{FF2B5EF4-FFF2-40B4-BE49-F238E27FC236}">
+                <a16:creationId xmlns:a16="http://schemas.microsoft.com/office/drawing/2014/main" id="{7C12FEE7-6492-0CB6-0B5A-EC361C024CE6}"/>
+              </a:ext>
+            </a:extLst>
+          </p:cNvPr>
+          <p:cNvSpPr>
+            <a:spLocks noGrp="1"/>
+          </p:cNvSpPr>
+          <p:nvPr>
+            <p:ph idx="1"/>
+          </p:nvPr>
+        </p:nvSpPr>
+        <p:spPr/>
+        <p:txBody>
+          <a:bodyPr/>
+          <a:lstStyle/>
+          <a:p>
+            <a:r>
+              <a:rPr lang="de-DE" dirty="0"/>
+              <a:t>Neue Main-file.</a:t>
+            </a:r>
+          </a:p>
+          <a:p>
+            <a:pPr lvl="1"/>
+            <a:r>
+              <a:rPr lang="de-DE" dirty="0"/>
+              <a:t>Soll Scheduling machen</a:t>
+            </a:r>
+          </a:p>
+          <a:p>
+            <a:pPr lvl="1"/>
+            <a:r>
+              <a:rPr lang="de-DE" dirty="0"/>
+              <a:t>Soll </a:t>
+            </a:r>
+            <a:r>
+              <a:rPr lang="de-DE" dirty="0" err="1"/>
+              <a:t>configuration</a:t>
+            </a:r>
+            <a:r>
+              <a:rPr lang="de-DE" dirty="0"/>
+              <a:t> lesen</a:t>
+            </a:r>
+          </a:p>
+          <a:p>
+            <a:pPr lvl="1"/>
+            <a:r>
+              <a:rPr lang="de-DE" dirty="0"/>
+              <a:t>Soll CAN Kommunikation lesen und </a:t>
+            </a:r>
+            <a:r>
+              <a:rPr lang="de-DE" dirty="0" err="1"/>
+              <a:t>umschaltung</a:t>
+            </a:r>
+            <a:r>
+              <a:rPr lang="de-DE" dirty="0"/>
+              <a:t> zu Dummy Kommunikation beinhalten</a:t>
+            </a:r>
+          </a:p>
+          <a:p>
+            <a:pPr lvl="2"/>
+            <a:r>
+              <a:rPr lang="de-DE" dirty="0"/>
+              <a:t>Dummy Kommunikation sendet dauerhaft (500ms, </a:t>
+            </a:r>
+            <a:r>
+              <a:rPr lang="de-DE" dirty="0" err="1"/>
+              <a:t>id</a:t>
+            </a:r>
+            <a:r>
+              <a:rPr lang="de-DE" dirty="0"/>
+              <a:t>=005, ambient </a:t>
+            </a:r>
+            <a:r>
+              <a:rPr lang="de-DE" dirty="0" err="1"/>
+              <a:t>temperature</a:t>
+            </a:r>
+            <a:r>
+              <a:rPr lang="de-DE" dirty="0"/>
+              <a:t> = 28 </a:t>
+            </a:r>
+            <a:r>
+              <a:rPr lang="de-DE" dirty="0" err="1"/>
+              <a:t>degree</a:t>
+            </a:r>
+            <a:r>
+              <a:rPr lang="de-DE" dirty="0"/>
+              <a:t>)</a:t>
+            </a:r>
+          </a:p>
+          <a:p>
+            <a:pPr lvl="2"/>
+            <a:r>
+              <a:rPr lang="de-DE" dirty="0"/>
+              <a:t>Dummy Kommunikation läuft über welchen Kanal?</a:t>
+            </a:r>
+          </a:p>
+          <a:p>
+            <a:pPr lvl="1"/>
+            <a:r>
+              <a:rPr lang="de-DE" dirty="0"/>
+              <a:t>Soll REST Server zu </a:t>
+            </a:r>
+            <a:r>
+              <a:rPr lang="de-DE" dirty="0" err="1"/>
+              <a:t>verfügung</a:t>
+            </a:r>
+            <a:r>
+              <a:rPr lang="de-DE" dirty="0"/>
+              <a:t> stellen, dort Daten publishen</a:t>
+            </a:r>
+          </a:p>
+          <a:p>
+            <a:pPr lvl="2"/>
+            <a:r>
+              <a:rPr lang="de-DE" dirty="0"/>
+              <a:t>Erstmal nur Lesen</a:t>
+            </a:r>
+          </a:p>
+          <a:p>
+            <a:pPr lvl="2"/>
+            <a:r>
+              <a:rPr lang="de-DE" dirty="0"/>
+              <a:t>Konfiguration kommt später</a:t>
+            </a:r>
+          </a:p>
+          <a:p>
+            <a:pPr lvl="1"/>
+            <a:r>
+              <a:rPr lang="de-DE" dirty="0"/>
+              <a:t>Soll Scheduling machen</a:t>
+            </a:r>
+          </a:p>
+          <a:p>
+            <a:pPr lvl="1"/>
+            <a:endParaRPr lang="de-DE" dirty="0"/>
+          </a:p>
+          <a:p>
+            <a:r>
+              <a:rPr lang="de-DE" dirty="0"/>
+              <a:t>DAS Können wir wieder </a:t>
+            </a:r>
+            <a:r>
+              <a:rPr lang="de-DE" dirty="0" err="1"/>
+              <a:t>Testdriven</a:t>
+            </a:r>
+            <a:r>
+              <a:rPr lang="de-DE" dirty="0"/>
+              <a:t> machen!</a:t>
+            </a:r>
+          </a:p>
+          <a:p>
+            <a:pPr lvl="1"/>
+            <a:r>
+              <a:rPr lang="de-DE" dirty="0"/>
+              <a:t>Hierzu brauchen wir Lokale SW-Ausführung, das ist nach dem restlichen Zeug mittlerweile ziemlich einfach.</a:t>
+            </a:r>
+          </a:p>
+        </p:txBody>
+      </p:sp>
+      <p:sp>
+        <p:nvSpPr>
+          <p:cNvPr id="4" name="Datumsplatzhalter 3">
+            <a:extLst>
+              <a:ext uri="{FF2B5EF4-FFF2-40B4-BE49-F238E27FC236}">
+                <a16:creationId xmlns:a16="http://schemas.microsoft.com/office/drawing/2014/main" id="{AAC8D4BD-E735-05EB-F77D-D020558DE7C7}"/>
+              </a:ext>
+            </a:extLst>
+          </p:cNvPr>
+          <p:cNvSpPr>
+            <a:spLocks noGrp="1"/>
+          </p:cNvSpPr>
+          <p:nvPr>
+            <p:ph type="dt" sz="half" idx="2"/>
+          </p:nvPr>
+        </p:nvSpPr>
+        <p:spPr/>
+        <p:txBody>
+          <a:bodyPr/>
+          <a:lstStyle/>
+          <a:p>
+            <a:fld id="{A4055450-52AE-4C8B-9714-2843C81CF833}" type="datetime1">
+              <a:rPr lang="de-DE" smtClean="0"/>
+              <a:t>05.09.2026</a:t>
+            </a:fld>
+            <a:endParaRPr lang="de-DE" dirty="0"/>
+          </a:p>
+        </p:txBody>
+      </p:sp>
+      <p:sp>
+        <p:nvSpPr>
+          <p:cNvPr id="5" name="Titel 4">
+            <a:extLst>
+              <a:ext uri="{FF2B5EF4-FFF2-40B4-BE49-F238E27FC236}">
+                <a16:creationId xmlns:a16="http://schemas.microsoft.com/office/drawing/2014/main" id="{A2967B5E-427C-B78E-EF52-347A2214B988}"/>
+              </a:ext>
+            </a:extLst>
+          </p:cNvPr>
+          <p:cNvSpPr>
+            <a:spLocks noGrp="1"/>
+          </p:cNvSpPr>
+          <p:nvPr>
+            <p:ph type="title"/>
+          </p:nvPr>
+        </p:nvSpPr>
+        <p:spPr/>
+        <p:txBody>
+          <a:bodyPr/>
+          <a:lstStyle/>
+          <a:p>
+            <a:r>
+              <a:rPr lang="de-DE" dirty="0"/>
+              <a:t>Nächster Meilenstein</a:t>
+            </a:r>
+          </a:p>
+        </p:txBody>
+      </p:sp>
+      <p:sp>
+        <p:nvSpPr>
+          <p:cNvPr id="6" name="Foliennummernplatzhalter 5">
+            <a:extLst>
+              <a:ext uri="{FF2B5EF4-FFF2-40B4-BE49-F238E27FC236}">
+                <a16:creationId xmlns:a16="http://schemas.microsoft.com/office/drawing/2014/main" id="{80BF7729-3B21-44CB-D0BF-19ADE772F682}"/>
+              </a:ext>
+            </a:extLst>
+          </p:cNvPr>
+          <p:cNvSpPr>
+            <a:spLocks noGrp="1"/>
+          </p:cNvSpPr>
+          <p:nvPr>
+            <p:ph type="sldNum" sz="quarter" idx="4"/>
+          </p:nvPr>
+        </p:nvSpPr>
+        <p:spPr/>
+        <p:txBody>
+          <a:bodyPr/>
+          <a:lstStyle/>
+          <a:p>
+            <a:fld id="{369A084B-84B6-4F15-B0F5-CCDC4176846B}" type="slidenum">
+              <a:rPr lang="de-DE" smtClean="0"/>
+              <a:pPr/>
+              <a:t>21</a:t>
+            </a:fld>
+            <a:endParaRPr lang="de-DE" dirty="0"/>
+          </a:p>
+        </p:txBody>
+      </p:sp>
+      <p:pic>
+        <p:nvPicPr>
+          <p:cNvPr id="8" name="Grafik 7">
+            <a:extLst>
+              <a:ext uri="{FF2B5EF4-FFF2-40B4-BE49-F238E27FC236}">
+                <a16:creationId xmlns:a16="http://schemas.microsoft.com/office/drawing/2014/main" id="{905A58BE-AE38-997E-A4AF-D3E657877C3D}"/>
+              </a:ext>
+            </a:extLst>
+          </p:cNvPr>
+          <p:cNvPicPr>
+            <a:picLocks noChangeAspect="1"/>
+          </p:cNvPicPr>
+          <p:nvPr/>
+        </p:nvPicPr>
+        <p:blipFill>
+          <a:blip r:embed="rId2"/>
+          <a:stretch>
+            <a:fillRect/>
+          </a:stretch>
+        </p:blipFill>
+        <p:spPr>
+          <a:xfrm>
+            <a:off x="2506587" y="5660566"/>
+            <a:ext cx="1762371" cy="314369"/>
+          </a:xfrm>
+          <a:prstGeom prst="rect">
+            <a:avLst/>
+          </a:prstGeom>
+        </p:spPr>
+      </p:pic>
+    </p:spTree>
+    <p:extLst>
+      <p:ext uri="{BB962C8B-B14F-4D97-AF65-F5344CB8AC3E}">
+        <p14:creationId xmlns:p14="http://schemas.microsoft.com/office/powerpoint/2010/main" val="2322296605"/>
+      </p:ext>
+    </p:extLst>
+  </p:cSld>
+  <p:clrMapOvr>
+    <a:masterClrMapping/>
+  </p:clrMapOvr>
+</p:sld>
+</file>
+
+<file path=ppt/slides/slide22.xml><?xml version="1.0" encoding="utf-8"?>
+<p:sld xmlns:a="http://schemas.openxmlformats.org/drawingml/2006/main" xmlns:r="http://schemas.openxmlformats.org/officeDocument/2006/relationships" xmlns:p="http://schemas.openxmlformats.org/presentationml/2006/main">
+  <p:cSld>
+    <p:spTree>
+      <p:nvGrpSpPr>
+        <p:cNvPr id="1" name=""/>
+        <p:cNvGrpSpPr/>
+        <p:nvPr/>
+      </p:nvGrpSpPr>
+      <p:grpSpPr>
+        <a:xfrm>
+          <a:off x="0" y="0"/>
+          <a:ext cx="0" cy="0"/>
+          <a:chOff x="0" y="0"/>
+          <a:chExt cx="0" cy="0"/>
+        </a:xfrm>
+      </p:grpSpPr>
+      <p:sp>
+        <p:nvSpPr>
+          <p:cNvPr id="2" name="Fußzeilenplatzhalter 1">
+            <a:extLst>
+              <a:ext uri="{FF2B5EF4-FFF2-40B4-BE49-F238E27FC236}">
+                <a16:creationId xmlns:a16="http://schemas.microsoft.com/office/drawing/2014/main" id="{AAF478D4-DCB1-5A8E-616A-177F5EB0B78C}"/>
+              </a:ext>
+            </a:extLst>
+          </p:cNvPr>
+          <p:cNvSpPr>
+            <a:spLocks noGrp="1"/>
+          </p:cNvSpPr>
+          <p:nvPr>
+            <p:ph type="ftr" sz="quarter" idx="3"/>
+          </p:nvPr>
+        </p:nvSpPr>
+        <p:spPr/>
+        <p:txBody>
+          <a:bodyPr/>
+          <a:lstStyle/>
+          <a:p>
+            <a:r>
+              <a:rPr lang="de-DE"/>
+              <a:t>Unternehmensmaster Smart Mechatronics</a:t>
+            </a:r>
+            <a:endParaRPr lang="de-DE" dirty="0"/>
+          </a:p>
+        </p:txBody>
+      </p:sp>
+      <p:sp>
+        <p:nvSpPr>
+          <p:cNvPr id="3" name="Inhaltsplatzhalter 2">
+            <a:extLst>
+              <a:ext uri="{FF2B5EF4-FFF2-40B4-BE49-F238E27FC236}">
+                <a16:creationId xmlns:a16="http://schemas.microsoft.com/office/drawing/2014/main" id="{D05B5255-B942-39F2-7B44-B609B77AD4ED}"/>
+              </a:ext>
+            </a:extLst>
+          </p:cNvPr>
+          <p:cNvSpPr>
+            <a:spLocks noGrp="1"/>
+          </p:cNvSpPr>
+          <p:nvPr>
+            <p:ph idx="1"/>
+          </p:nvPr>
+        </p:nvSpPr>
+        <p:spPr/>
+        <p:txBody>
+          <a:bodyPr/>
+          <a:lstStyle/>
+          <a:p>
+            <a:r>
+              <a:rPr lang="de-DE" dirty="0" err="1"/>
+              <a:t>Canbus</a:t>
+            </a:r>
+            <a:r>
+              <a:rPr lang="de-DE" dirty="0"/>
+              <a:t> </a:t>
+            </a:r>
+            <a:r>
+              <a:rPr lang="de-DE" dirty="0" err="1"/>
+              <a:t>vial</a:t>
+            </a:r>
+            <a:r>
+              <a:rPr lang="de-DE" dirty="0"/>
+              <a:t> </a:t>
+            </a:r>
+            <a:r>
+              <a:rPr lang="de-DE" dirty="0" err="1"/>
+              <a:t>simulation</a:t>
+            </a:r>
+            <a:endParaRPr lang="de-DE" dirty="0"/>
+          </a:p>
+          <a:p>
+            <a:r>
+              <a:rPr lang="de-DE" dirty="0"/>
+              <a:t>Rest: </a:t>
+            </a:r>
+            <a:r>
+              <a:rPr lang="de-DE" dirty="0" err="1"/>
+              <a:t>only</a:t>
+            </a:r>
+            <a:r>
+              <a:rPr lang="de-DE" dirty="0"/>
+              <a:t> </a:t>
+            </a:r>
+            <a:r>
+              <a:rPr lang="de-DE" dirty="0" err="1"/>
+              <a:t>read</a:t>
+            </a:r>
+            <a:r>
+              <a:rPr lang="de-DE" dirty="0"/>
+              <a:t> </a:t>
+            </a:r>
+            <a:r>
+              <a:rPr lang="de-DE" dirty="0" err="1"/>
+              <a:t>configurations</a:t>
+            </a:r>
+            <a:r>
+              <a:rPr lang="de-DE" dirty="0"/>
+              <a:t> and </a:t>
+            </a:r>
+            <a:r>
+              <a:rPr lang="de-DE" dirty="0" err="1"/>
+              <a:t>can</a:t>
+            </a:r>
+            <a:r>
+              <a:rPr lang="de-DE" dirty="0"/>
+              <a:t> </a:t>
+            </a:r>
+            <a:r>
+              <a:rPr lang="de-DE" dirty="0" err="1"/>
+              <a:t>value</a:t>
+            </a:r>
+            <a:endParaRPr lang="de-DE" dirty="0"/>
+          </a:p>
+          <a:p>
+            <a:r>
+              <a:rPr lang="de-DE" dirty="0"/>
+              <a:t>Scheduler</a:t>
+            </a:r>
+          </a:p>
+          <a:p>
+            <a:r>
+              <a:rPr lang="de-DE" dirty="0" err="1"/>
+              <a:t>Configuration</a:t>
+            </a:r>
+            <a:r>
+              <a:rPr lang="de-DE" dirty="0"/>
+              <a:t> </a:t>
+            </a:r>
+            <a:r>
+              <a:rPr lang="de-DE" dirty="0" err="1"/>
+              <a:t>reader</a:t>
+            </a:r>
+            <a:endParaRPr lang="de-DE" dirty="0"/>
+          </a:p>
+          <a:p>
+            <a:r>
+              <a:rPr lang="de-DE" dirty="0"/>
+              <a:t>Main</a:t>
+            </a:r>
+          </a:p>
+          <a:p>
+            <a:r>
+              <a:rPr lang="de-DE" dirty="0"/>
+              <a:t>Alle </a:t>
+            </a:r>
+            <a:r>
+              <a:rPr lang="de-DE" dirty="0" err="1"/>
+              <a:t>tests</a:t>
+            </a:r>
+            <a:r>
+              <a:rPr lang="de-DE" dirty="0"/>
+              <a:t> grün … Zeit fürs Review!</a:t>
+            </a:r>
+          </a:p>
+          <a:p>
+            <a:pPr lvl="1"/>
+            <a:r>
+              <a:rPr lang="de-DE" dirty="0"/>
+              <a:t>Logger muss komplettiert werden</a:t>
+            </a:r>
+          </a:p>
+          <a:p>
+            <a:pPr lvl="1"/>
+            <a:r>
+              <a:rPr lang="de-DE" dirty="0"/>
+              <a:t>CAN muss getestet werden (remote </a:t>
+            </a:r>
+            <a:r>
+              <a:rPr lang="de-DE" dirty="0" err="1"/>
+              <a:t>debugging</a:t>
+            </a:r>
+            <a:r>
+              <a:rPr lang="de-DE" dirty="0"/>
+              <a:t>)</a:t>
+            </a:r>
+          </a:p>
+          <a:p>
+            <a:pPr lvl="1"/>
+            <a:r>
+              <a:rPr lang="de-DE" dirty="0"/>
+              <a:t>Logger muss aus </a:t>
+            </a:r>
+            <a:r>
+              <a:rPr lang="de-DE"/>
+              <a:t>dem Scheduler raus</a:t>
+            </a:r>
+          </a:p>
+          <a:p>
+            <a:pPr lvl="1"/>
+            <a:endParaRPr lang="de-DE"/>
+          </a:p>
+        </p:txBody>
+      </p:sp>
+      <p:sp>
+        <p:nvSpPr>
+          <p:cNvPr id="4" name="Datumsplatzhalter 3">
+            <a:extLst>
+              <a:ext uri="{FF2B5EF4-FFF2-40B4-BE49-F238E27FC236}">
+                <a16:creationId xmlns:a16="http://schemas.microsoft.com/office/drawing/2014/main" id="{93A77C96-4A92-789E-7B75-A0DC3CDF04AC}"/>
+              </a:ext>
+            </a:extLst>
+          </p:cNvPr>
+          <p:cNvSpPr>
+            <a:spLocks noGrp="1"/>
+          </p:cNvSpPr>
+          <p:nvPr>
+            <p:ph type="dt" sz="half" idx="2"/>
+          </p:nvPr>
+        </p:nvSpPr>
+        <p:spPr/>
+        <p:txBody>
+          <a:bodyPr/>
+          <a:lstStyle/>
+          <a:p>
+            <a:fld id="{A4055450-52AE-4C8B-9714-2843C81CF833}" type="datetime1">
+              <a:rPr lang="de-DE" smtClean="0"/>
+              <a:t>05.09.2026</a:t>
+            </a:fld>
+            <a:endParaRPr lang="de-DE" dirty="0"/>
+          </a:p>
+        </p:txBody>
+      </p:sp>
+      <p:sp>
+        <p:nvSpPr>
+          <p:cNvPr id="5" name="Titel 4">
+            <a:extLst>
+              <a:ext uri="{FF2B5EF4-FFF2-40B4-BE49-F238E27FC236}">
+                <a16:creationId xmlns:a16="http://schemas.microsoft.com/office/drawing/2014/main" id="{8D8CF8AD-153E-5BDB-482B-AC3A129CE670}"/>
+              </a:ext>
+            </a:extLst>
+          </p:cNvPr>
+          <p:cNvSpPr>
+            <a:spLocks noGrp="1"/>
+          </p:cNvSpPr>
+          <p:nvPr>
+            <p:ph type="title"/>
+          </p:nvPr>
+        </p:nvSpPr>
+        <p:spPr/>
+        <p:txBody>
+          <a:bodyPr/>
+          <a:lstStyle/>
+          <a:p>
+            <a:r>
+              <a:rPr lang="de-DE" dirty="0"/>
+              <a:t>MVP</a:t>
+            </a:r>
+          </a:p>
+        </p:txBody>
+      </p:sp>
+      <p:sp>
+        <p:nvSpPr>
+          <p:cNvPr id="6" name="Foliennummernplatzhalter 5">
+            <a:extLst>
+              <a:ext uri="{FF2B5EF4-FFF2-40B4-BE49-F238E27FC236}">
+                <a16:creationId xmlns:a16="http://schemas.microsoft.com/office/drawing/2014/main" id="{71FDC844-7342-0577-D852-4A617DDCF2C4}"/>
+              </a:ext>
+            </a:extLst>
+          </p:cNvPr>
+          <p:cNvSpPr>
+            <a:spLocks noGrp="1"/>
+          </p:cNvSpPr>
+          <p:nvPr>
+            <p:ph type="sldNum" sz="quarter" idx="4"/>
+          </p:nvPr>
+        </p:nvSpPr>
+        <p:spPr/>
+        <p:txBody>
+          <a:bodyPr/>
+          <a:lstStyle/>
+          <a:p>
+            <a:fld id="{369A084B-84B6-4F15-B0F5-CCDC4176846B}" type="slidenum">
+              <a:rPr lang="de-DE" smtClean="0"/>
+              <a:pPr/>
+              <a:t>22</a:t>
+            </a:fld>
+            <a:endParaRPr lang="de-DE" dirty="0"/>
+          </a:p>
+        </p:txBody>
+      </p:sp>
+    </p:spTree>
+    <p:extLst>
+      <p:ext uri="{BB962C8B-B14F-4D97-AF65-F5344CB8AC3E}">
+        <p14:creationId xmlns:p14="http://schemas.microsoft.com/office/powerpoint/2010/main" val="3464919168"/>
       </p:ext>
     </p:extLst>
   </p:cSld>
